--- a/docs/slides/aiInvesting-slides.pptx
+++ b/docs/slides/aiInvesting-slides.pptx
@@ -28,6 +28,7 @@
     <p:sldId id="273" r:id="rId4"/>
     <p:sldId id="274" r:id="rId3"/>
     <p:sldId id="275" r:id="rId2"/>
+    <p:sldId id="276" r:id="rId27"/>
   </p:sldIdLst>
   <p:sldSz cx="12192000" cy="6858000"/>
   <p:notesSz cx="6858000" cy="9144000"/>
@@ -5163,7 +5164,7 @@
                 </a:solidFill>
                 <a:latin typeface="Aptos"/>
               </a:rPr>
-              <a:t>Phase 2. One call per ticker per week, from a point-in-time snapshot</a:t>
+              <a:t>Phase 2. One call per ticker at each rebalance, from a point-in-time snapshot</a:t>
             </a:r>
           </a:p>
         </p:txBody>
@@ -8762,7 +8763,7 @@
                 </a:solidFill>
                 <a:latin typeface="Aptos"/>
               </a:rPr>
-              <a:t>Dashboard mockup with sample data. The chart is computed in the page from the same logic as the displayed code.</a:t>
+              <a:t>Strategy tab of the live page. The chart is drawn from the book's actual weights and the cached prices.</a:t>
             </a:r>
           </a:p>
         </p:txBody>
@@ -8776,7 +8777,7 @@
         <p:spPr>
           <a:xfrm>
             <a:off x="466344" y="969264"/>
-            <a:ext cx="7754112" cy="3913632"/>
+            <a:ext cx="7754112" cy="3164738"/>
           </a:xfrm>
           <a:prstGeom prst="roundRect">
             <a:avLst>
@@ -8832,7 +8833,7 @@
         <p:spPr>
           <a:xfrm>
             <a:off x="502920" y="1005840"/>
-            <a:ext cx="7680960" cy="3840480"/>
+            <a:ext cx="7680960" cy="3091586"/>
           </a:xfrm>
           <a:prstGeom prst="rect">
             <a:avLst/>
@@ -8891,7 +8892,7 @@
                 </a:solidFill>
                 <a:latin typeface="Aptos"/>
               </a:rPr>
-              <a:t>Entry: close above yesterday's 20-day high.  Exit: close below the 20-day average.  Size: inverse volatility, no name above 30%.  Cost: 5 bp per unit of weight traded.  Fill: next open, never the same close.</a:t>
+              <a:t>What the tab shows: the season's quant book on one ticker. In this run the equal-weight baseline won validation every season, so the book held each of the 12 names at 8%, rebalanced weekly. Cost: 5 bp per unit of weight traded. Fill: next open, never the same close.</a:t>
             </a:r>
           </a:p>
         </p:txBody>
@@ -9007,7 +9008,7 @@
                 </a:solidFill>
                 <a:latin typeface="Aptos"/>
               </a:rPr>
-              <a:t>Black is the close. Blue is the 20-day average, the exit line. Grey steps are yesterday's 20-day high, the entry line. Green triangles mark entries, red mark exits. Shaded bands are days the strategy held the name.</a:t>
+              <a:t>Black is the close; blue and orange are the 20 and 50-day averages; grey steps are the previous 20-day high. Green triangles mark where the book entered, red where it exited. Shaded bands are days it held the name.</a:t>
             </a:r>
           </a:p>
         </p:txBody>
@@ -9123,7 +9124,7 @@
                 </a:solidFill>
                 <a:latin typeface="Aptos"/>
               </a:rPr>
-              <a:t>The weight the code assigned, capped at 30% and scaled by inverse volatility. Then the sleeve's growth against holding the stock at a constant 30%.</a:t>
+              <a:t>The weight the book assigned to this name, then the sleeve's growth against simply holding the stock at the book's maximum weight.</a:t>
             </a:r>
           </a:p>
         </p:txBody>
@@ -9239,7 +9240,7 @@
                 </a:solidFill>
                 <a:latin typeface="Aptos"/>
               </a:rPr>
-              <a:t>Students can see every rule in the code acting on prices, then open the trade list to check each entry and exit against the numbers that triggered it.</a:t>
+              <a:t>Whatever the code says, students can check it against prices day by day, switch tickers, and open the trade list to see each entry and exit.</a:t>
             </a:r>
           </a:p>
         </p:txBody>
@@ -10868,7 +10869,7 @@
                 </a:solidFill>
                 <a:latin typeface="Aptos"/>
               </a:rPr>
-              <a:t>Budget math on a laptop: about 35 model calls and 3 minutes per season, so 6 seasons take about 20 minutes. The class demo with three personas is about 40 minutes, which is why Replay exists.</a:t>
+              <a:t>Budget math on a laptop: about 50 model calls and 4 minutes per season, so 6 seasons take 20 to 30 minutes. Three personas triple the desk calls, which is why Replay exists.</a:t>
             </a:r>
           </a:p>
         </p:txBody>
@@ -10998,7 +10999,7 @@
                 </a:solidFill>
                 <a:latin typeface="Aptos"/>
               </a:rPr>
-              <a:t>One local page, no server to host, no login. Opens in walkthrough mode</a:t>
+              <a:t>One local page, no login. Press Walkthrough for the 17-step guided tour</a:t>
             </a:r>
           </a:p>
         </p:txBody>
@@ -11067,7 +11068,7 @@
                 </a:solidFill>
                 <a:latin typeface="Aptos"/>
               </a:rPr>
-              <a:t>Mockup with sample data, rendered from docs/mockups/mission-control.html in the repo.</a:t>
+              <a:t>Live page during a real campaign on Oct 23, 2026, qwen3:8b on a Mac Studio.</a:t>
             </a:r>
           </a:p>
         </p:txBody>
@@ -11080,8 +11081,8 @@
         </p:nvSpPr>
         <p:spPr>
           <a:xfrm>
-            <a:off x="466344" y="1003553"/>
-            <a:ext cx="7754112" cy="4393692"/>
+            <a:off x="795528" y="969264"/>
+            <a:ext cx="7095744" cy="4462272"/>
           </a:xfrm>
           <a:prstGeom prst="roundRect">
             <a:avLst>
@@ -11136,8 +11137,8 @@
         </p:blipFill>
         <p:spPr>
           <a:xfrm>
-            <a:off x="502920" y="1040129"/>
-            <a:ext cx="7680960" cy="4320540"/>
+            <a:off x="832104" y="1005840"/>
+            <a:ext cx="7022592" cy="4389120"/>
           </a:xfrm>
           <a:prstGeom prst="rect">
             <a:avLst/>
@@ -11743,7 +11744,7 @@
                 </a:solidFill>
                 <a:latin typeface="Aptos"/>
               </a:rPr>
-              <a:t>Sample data. Four seasons cannot separate skill from luck. The lab teaches the measurement and the honest question, not a result.</a:t>
+              <a:t>Real run, Oct 23, 2026. A handful of seasons cannot separate skill from luck. The lab teaches the measurement and the honest question, not a result.</a:t>
             </a:r>
           </a:p>
         </p:txBody>
@@ -11756,8 +11757,8 @@
         </p:nvSpPr>
         <p:spPr>
           <a:xfrm>
-            <a:off x="466344" y="1292732"/>
-            <a:ext cx="7754112" cy="3769614"/>
+            <a:off x="832104" y="969264"/>
+            <a:ext cx="7022592" cy="4416552"/>
           </a:xfrm>
           <a:prstGeom prst="roundRect">
             <a:avLst>
@@ -11812,8 +11813,8 @@
         </p:blipFill>
         <p:spPr>
           <a:xfrm>
-            <a:off x="502920" y="1329309"/>
-            <a:ext cx="7680960" cy="3696462"/>
+            <a:off x="868680" y="1005840"/>
+            <a:ext cx="6949440" cy="4343400"/>
           </a:xfrm>
           <a:prstGeom prst="rect">
             <a:avLst/>
@@ -14564,7 +14565,7 @@
                 </a:solidFill>
                 <a:latin typeface="Georgia"/>
               </a:rPr>
-              <a:t>Run it yourself</a:t>
+              <a:t>What actually happened: the first full run</a:t>
             </a:r>
           </a:p>
         </p:txBody>
@@ -14598,103 +14599,32 @@
                 </a:solidFill>
                 <a:latin typeface="Aptos"/>
               </a:rPr>
-              <a:t>Everything is public. Clone it, pull one model, open the page</a:t>
-            </a:r>
-          </a:p>
-        </p:txBody>
-      </p:sp>
-      <p:sp>
-        <p:nvSpPr>
-          <p:cNvPr id="5" name="TextBox 4"/>
-          <p:cNvSpPr txBox="1"/>
-          <p:nvPr/>
-        </p:nvSpPr>
-        <p:spPr>
-          <a:xfrm>
-            <a:off x="10954512" y="6592824"/>
-            <a:ext cx="731520" cy="137160"/>
-          </a:xfrm>
-          <a:prstGeom prst="rect">
-            <a:avLst/>
-          </a:prstGeom>
-          <a:noFill/>
-        </p:spPr>
-        <p:txBody>
-          <a:bodyPr wrap="square" lIns="45720" rIns="45720" tIns="27432" bIns="27432" anchor="t">
-            <a:spAutoFit/>
-          </a:bodyPr>
-          <a:lstStyle/>
-          <a:p>
-            <a:pPr algn="r"/>
-            <a:r>
-              <a:rPr sz="750" b="0" i="0">
-                <a:solidFill>
-                  <a:srgbClr val="667085"/>
-                </a:solidFill>
-                <a:latin typeface="Aptos"/>
-              </a:rPr>
-              <a:t>19</a:t>
-            </a:r>
-          </a:p>
-        </p:txBody>
-      </p:sp>
-      <p:sp>
-        <p:nvSpPr>
-          <p:cNvPr id="6" name="TextBox 5"/>
-          <p:cNvSpPr txBox="1"/>
-          <p:nvPr/>
-        </p:nvSpPr>
-        <p:spPr>
-          <a:xfrm>
-            <a:off x="502920" y="6556248"/>
-            <a:ext cx="10094976" cy="228600"/>
-          </a:xfrm>
-          <a:prstGeom prst="rect">
-            <a:avLst/>
-          </a:prstGeom>
-          <a:noFill/>
-        </p:spPr>
-        <p:txBody>
-          <a:bodyPr wrap="square" lIns="45720" rIns="45720" tIns="27432" bIns="27432" anchor="t">
-            <a:spAutoFit/>
-          </a:bodyPr>
-          <a:lstStyle/>
-          <a:p>
-            <a:r>
-              <a:rPr sz="750" b="0" i="0">
-                <a:solidFill>
-                  <a:srgbClr val="667085"/>
-                </a:solidFill>
-                <a:latin typeface="Aptos"/>
-              </a:rPr>
-              <a:t>Status on Oct 24, 2026: design spec and the dashboard mockup are published; the Python package is landing in the same repo this week.</a:t>
-            </a:r>
-          </a:p>
-        </p:txBody>
-      </p:sp>
-      <p:sp>
-        <p:nvSpPr>
-          <p:cNvPr id="7" name="Rounded Rectangle 6"/>
+              <a:t>6 quarterly seasons, qwen3:8b, one momentum persona, coach on, Oct 23, 2026</a:t>
+            </a:r>
+          </a:p>
+        </p:txBody>
+      </p:sp>
+      <p:sp>
+        <p:nvSpPr>
+          <p:cNvPr id="5" name="Rounded Rectangle 4"/>
           <p:cNvSpPr/>
           <p:nvPr/>
         </p:nvSpPr>
         <p:spPr>
           <a:xfrm>
             <a:off x="502920" y="1005840"/>
-            <a:ext cx="6675120" cy="2423160"/>
+            <a:ext cx="11183112" cy="493776"/>
           </a:xfrm>
           <a:prstGeom prst="roundRect">
             <a:avLst>
-              <a:gd name="adj" fmla="val 6000"/>
+              <a:gd name="adj" fmla="val 12000"/>
             </a:avLst>
           </a:prstGeom>
           <a:solidFill>
-            <a:srgbClr val="F6F8FA"/>
+            <a:srgbClr val="0B1F33"/>
           </a:solidFill>
-          <a:ln w="10160">
-            <a:solidFill>
-              <a:srgbClr val="DDE3EA"/>
-            </a:solidFill>
+          <a:ln>
+            <a:noFill/>
           </a:ln>
           <a:effectLst/>
         </p:spPr>
@@ -14713,168 +14643,101 @@
           </a:fontRef>
         </p:style>
         <p:txBody>
-          <a:bodyPr rtlCol="0" anchor="ctr"/>
+          <a:bodyPr rtlCol="0" anchor="ctr" wrap="square" lIns="73152" rIns="73152" tIns="27432" bIns="27432"/>
           <a:lstStyle/>
           <a:p>
             <a:pPr algn="ctr"/>
-          </a:p>
-        </p:txBody>
-      </p:sp>
-      <p:sp>
-        <p:nvSpPr>
-          <p:cNvPr id="8" name="TextBox 7"/>
-          <p:cNvSpPr txBox="1"/>
-          <p:nvPr/>
-        </p:nvSpPr>
-        <p:spPr>
-          <a:xfrm>
-            <a:off x="630936" y="1078992"/>
-            <a:ext cx="6419088" cy="201168"/>
-          </a:xfrm>
-          <a:prstGeom prst="rect">
-            <a:avLst/>
-          </a:prstGeom>
-          <a:noFill/>
-        </p:spPr>
-        <p:txBody>
-          <a:bodyPr wrap="square" lIns="45720" rIns="45720" tIns="27432" bIns="27432" anchor="t">
-            <a:spAutoFit/>
-          </a:bodyPr>
-          <a:lstStyle/>
-          <a:p>
-            <a:r>
-              <a:rPr sz="750" b="1" i="0">
-                <a:solidFill>
-                  <a:srgbClr val="1769AA"/>
-                </a:solidFill>
-                <a:latin typeface="Aptos"/>
-              </a:rPr>
-              <a:t>Three commands</a:t>
-            </a:r>
-          </a:p>
-        </p:txBody>
-      </p:sp>
-      <p:sp>
-        <p:nvSpPr>
-          <p:cNvPr id="9" name="TextBox 8"/>
-          <p:cNvSpPr txBox="1"/>
-          <p:nvPr/>
-        </p:nvSpPr>
-        <p:spPr>
-          <a:xfrm>
-            <a:off x="630936" y="1316736"/>
-            <a:ext cx="6419088" cy="2039111"/>
-          </a:xfrm>
-          <a:prstGeom prst="rect">
-            <a:avLst/>
-          </a:prstGeom>
-          <a:noFill/>
-        </p:spPr>
-        <p:txBody>
-          <a:bodyPr wrap="square" lIns="18288" rIns="18288" tIns="27432" bIns="27432" anchor="t">
-            <a:spAutoFit/>
-          </a:bodyPr>
-          <a:lstStyle/>
-          <a:p>
-            <a:r>
-              <a:rPr sz="950" b="0" i="0">
-                <a:solidFill>
-                  <a:srgbClr val="0B1F33"/>
-                </a:solidFill>
-                <a:latin typeface="Courier New"/>
-              </a:rPr>
-              <a:t>ollama pull qwen3:8b</a:t>
-            </a:r>
-          </a:p>
-          <a:p>
-            <a:r>
-              <a:rPr sz="950" b="0" i="0">
-                <a:solidFill>
-                  <a:srgbClr val="0B1F33"/>
-                </a:solidFill>
-                <a:latin typeface="Courier New"/>
-              </a:rPr>
-              <a:t>git clone https://github.com/jimkliew/aiInvesting.git &amp;&amp; cd aiInvesting</a:t>
-            </a:r>
-          </a:p>
-          <a:p>
-            <a:r>
-              <a:rPr sz="950" b="0" i="0">
-                <a:solidFill>
-                  <a:srgbClr val="0B1F33"/>
-                </a:solidFill>
-                <a:latin typeface="Courier New"/>
-              </a:rPr>
-              <a:t>uv run python -m aitrader serve        # http://localhost:8000, click Run campaign</a:t>
-            </a:r>
-          </a:p>
-          <a:p>
-            <a:r>
-              <a:rPr sz="950" b="0" i="0">
-                <a:solidFill>
-                  <a:srgbClr val="0B1F33"/>
-                </a:solidFill>
-                <a:latin typeface="Courier New"/>
-              </a:rPr>
-              <a:t/>
-            </a:r>
-          </a:p>
-          <a:p>
-            <a:r>
-              <a:rPr sz="950" b="0" i="0">
-                <a:solidFill>
-                  <a:srgbClr val="0B1F33"/>
-                </a:solidFill>
-                <a:latin typeface="Courier New"/>
-              </a:rPr>
-              <a:t># or the command line</a:t>
-            </a:r>
-          </a:p>
-          <a:p>
-            <a:r>
-              <a:rPr sz="950" b="0" i="0">
-                <a:solidFill>
-                  <a:srgbClr val="0B1F33"/>
-                </a:solidFill>
-                <a:latin typeface="Courier New"/>
-              </a:rPr>
-              <a:t>uv run python -m aitrader fetch "12 large-cap US tech names plus SPY, 2015 to today"</a:t>
-            </a:r>
-          </a:p>
-          <a:p>
-            <a:r>
-              <a:rPr sz="950" b="0" i="0">
-                <a:solidFill>
-                  <a:srgbClr val="0B1F33"/>
-                </a:solidFill>
-                <a:latin typeface="Courier New"/>
-              </a:rPr>
-              <a:t>uv run python -m aitrader campaign --seasons 6 --personas 1</a:t>
-            </a:r>
-          </a:p>
-          <a:p>
-            <a:r>
-              <a:rPr sz="950" b="0" i="0">
-                <a:solidFill>
-                  <a:srgbClr val="0B1F33"/>
-                </a:solidFill>
-                <a:latin typeface="Courier New"/>
-              </a:rPr>
-              <a:t>uv run python -m aitrader replay runs/&lt;campaign&gt; --speed 5</a:t>
-            </a:r>
-          </a:p>
-        </p:txBody>
-      </p:sp>
-      <p:sp>
-        <p:nvSpPr>
-          <p:cNvPr id="10" name="Rounded Rectangle 9"/>
+            <a:r>
+              <a:rPr sz="1350" b="0" i="0">
+                <a:solidFill>
+                  <a:srgbClr val="FFFFFF"/>
+                </a:solidFill>
+                <a:latin typeface="Georgia"/>
+              </a:rPr>
+              <a:t>Out of sample, season by season. Read it as a measurement of the loop, not as a verdict on AI trading.</a:t>
+            </a:r>
+          </a:p>
+        </p:txBody>
+      </p:sp>
+      <p:sp>
+        <p:nvSpPr>
+          <p:cNvPr id="6" name="TextBox 5"/>
+          <p:cNvSpPr txBox="1"/>
+          <p:nvPr/>
+        </p:nvSpPr>
+        <p:spPr>
+          <a:xfrm>
+            <a:off x="10954512" y="6592824"/>
+            <a:ext cx="731520" cy="137160"/>
+          </a:xfrm>
+          <a:prstGeom prst="rect">
+            <a:avLst/>
+          </a:prstGeom>
+          <a:noFill/>
+        </p:spPr>
+        <p:txBody>
+          <a:bodyPr wrap="square" lIns="45720" rIns="45720" tIns="27432" bIns="27432" anchor="t">
+            <a:spAutoFit/>
+          </a:bodyPr>
+          <a:lstStyle/>
+          <a:p>
+            <a:pPr algn="r"/>
+            <a:r>
+              <a:rPr sz="750" b="0" i="0">
+                <a:solidFill>
+                  <a:srgbClr val="667085"/>
+                </a:solidFill>
+                <a:latin typeface="Aptos"/>
+              </a:rPr>
+              <a:t>19</a:t>
+            </a:r>
+          </a:p>
+        </p:txBody>
+      </p:sp>
+      <p:sp>
+        <p:nvSpPr>
+          <p:cNvPr id="7" name="TextBox 6"/>
+          <p:cNvSpPr txBox="1"/>
+          <p:nvPr/>
+        </p:nvSpPr>
+        <p:spPr>
+          <a:xfrm>
+            <a:off x="502920" y="6556248"/>
+            <a:ext cx="10094976" cy="228600"/>
+          </a:xfrm>
+          <a:prstGeom prst="rect">
+            <a:avLst/>
+          </a:prstGeom>
+          <a:noFill/>
+        </p:spPr>
+        <p:txBody>
+          <a:bodyPr wrap="square" lIns="45720" rIns="45720" tIns="27432" bIns="27432" anchor="t">
+            <a:spAutoFit/>
+          </a:bodyPr>
+          <a:lstStyle/>
+          <a:p>
+            <a:r>
+              <a:rPr sz="750" b="0" i="0">
+                <a:solidFill>
+                  <a:srgbClr val="667085"/>
+                </a:solidFill>
+                <a:latin typeface="Aptos"/>
+              </a:rPr>
+              <a:t>Research tried 28 strategies; the coach applied 16 changes. Costs 5 bp per unit of weight traded. Partial seasons use data up to the last available day.</a:t>
+            </a:r>
+          </a:p>
+        </p:txBody>
+      </p:sp>
+      <p:sp>
+        <p:nvSpPr>
+          <p:cNvPr id="8" name="Rounded Rectangle 7"/>
           <p:cNvSpPr/>
           <p:nvPr/>
         </p:nvSpPr>
         <p:spPr>
           <a:xfrm>
-            <a:off x="7360920" y="1005840"/>
-            <a:ext cx="4325112" cy="2423160"/>
+            <a:off x="502920" y="1755648"/>
+            <a:ext cx="2569464" cy="1188720"/>
           </a:xfrm>
           <a:prstGeom prst="roundRect">
             <a:avLst>
@@ -14915,388 +14778,82 @@
       </p:sp>
       <p:sp>
         <p:nvSpPr>
-          <p:cNvPr id="11" name="TextBox 10"/>
-          <p:cNvSpPr txBox="1"/>
-          <p:nvPr/>
-        </p:nvSpPr>
-        <p:spPr>
-          <a:xfrm>
-            <a:off x="7507224" y="1097280"/>
-            <a:ext cx="4023360" cy="219456"/>
-          </a:xfrm>
-          <a:prstGeom prst="rect">
-            <a:avLst/>
-          </a:prstGeom>
-          <a:noFill/>
-        </p:spPr>
-        <p:txBody>
-          <a:bodyPr wrap="square" lIns="45720" rIns="45720" tIns="27432" bIns="27432" anchor="t">
-            <a:spAutoFit/>
-          </a:bodyPr>
-          <a:lstStyle/>
-          <a:p>
-            <a:r>
-              <a:rPr sz="950" b="1" i="0">
-                <a:solidFill>
-                  <a:srgbClr val="1769AA"/>
-                </a:solidFill>
-                <a:latin typeface="Aptos"/>
-              </a:rPr>
-              <a:t>WHICH MODEL FOR WHICH LAPTOP</a:t>
-            </a:r>
-          </a:p>
-        </p:txBody>
-      </p:sp>
-      <p:sp>
-        <p:nvSpPr>
-          <p:cNvPr id="12" name="TextBox 11"/>
-          <p:cNvSpPr txBox="1"/>
-          <p:nvPr/>
-        </p:nvSpPr>
-        <p:spPr>
-          <a:xfrm>
-            <a:off x="7507224" y="1389888"/>
-            <a:ext cx="822960" cy="274320"/>
-          </a:xfrm>
-          <a:prstGeom prst="rect">
-            <a:avLst/>
-          </a:prstGeom>
-          <a:noFill/>
-        </p:spPr>
-        <p:txBody>
-          <a:bodyPr wrap="square" lIns="45720" rIns="45720" tIns="27432" bIns="27432" anchor="t">
-            <a:spAutoFit/>
-          </a:bodyPr>
-          <a:lstStyle/>
-          <a:p>
-            <a:r>
-              <a:rPr sz="1300" b="1" i="0">
+          <p:cNvPr id="9" name="TextBox 8"/>
+          <p:cNvSpPr txBox="1"/>
+          <p:nvPr/>
+        </p:nvSpPr>
+        <p:spPr>
+          <a:xfrm>
+            <a:off x="694944" y="1865376"/>
+            <a:ext cx="2194560" cy="457200"/>
+          </a:xfrm>
+          <a:prstGeom prst="rect">
+            <a:avLst/>
+          </a:prstGeom>
+          <a:noFill/>
+        </p:spPr>
+        <p:txBody>
+          <a:bodyPr wrap="square" lIns="45720" rIns="45720" tIns="27432" bIns="27432" anchor="t">
+            <a:spAutoFit/>
+          </a:bodyPr>
+          <a:lstStyle/>
+          <a:p>
+            <a:r>
+              <a:rPr sz="2400" b="1" i="0">
                 <a:solidFill>
                   <a:srgbClr val="002D72"/>
                 </a:solidFill>
                 <a:latin typeface="Georgia"/>
               </a:rPr>
-              <a:t>8 GB</a:t>
-            </a:r>
-          </a:p>
-        </p:txBody>
-      </p:sp>
-      <p:sp>
-        <p:nvSpPr>
-          <p:cNvPr id="13" name="TextBox 12"/>
-          <p:cNvSpPr txBox="1"/>
-          <p:nvPr/>
-        </p:nvSpPr>
-        <p:spPr>
-          <a:xfrm>
-            <a:off x="8366760" y="1389888"/>
-            <a:ext cx="1280160" cy="274320"/>
-          </a:xfrm>
-          <a:prstGeom prst="rect">
-            <a:avLst/>
-          </a:prstGeom>
-          <a:noFill/>
-        </p:spPr>
-        <p:txBody>
-          <a:bodyPr wrap="square" lIns="45720" rIns="45720" tIns="27432" bIns="27432" anchor="t">
-            <a:spAutoFit/>
-          </a:bodyPr>
-          <a:lstStyle/>
-          <a:p>
-            <a:r>
-              <a:rPr sz="1100" b="1" i="0">
-                <a:solidFill>
-                  <a:srgbClr val="0B1F33"/>
-                </a:solidFill>
-                <a:latin typeface="Courier New"/>
-              </a:rPr>
-              <a:t>qwen3:4b</a:t>
-            </a:r>
-          </a:p>
-        </p:txBody>
-      </p:sp>
-      <p:sp>
-        <p:nvSpPr>
-          <p:cNvPr id="14" name="TextBox 13"/>
-          <p:cNvSpPr txBox="1"/>
-          <p:nvPr/>
-        </p:nvSpPr>
-        <p:spPr>
-          <a:xfrm>
-            <a:off x="8366760" y="1645920"/>
-            <a:ext cx="3200400" cy="329184"/>
-          </a:xfrm>
-          <a:prstGeom prst="rect">
-            <a:avLst/>
-          </a:prstGeom>
-          <a:noFill/>
-        </p:spPr>
-        <p:txBody>
-          <a:bodyPr wrap="square" lIns="45720" rIns="45720" tIns="27432" bIns="27432" anchor="t">
-            <a:spAutoFit/>
-          </a:bodyPr>
-          <a:lstStyle/>
-          <a:p>
-            <a:r>
-              <a:rPr sz="1000" b="0" i="0">
+              <a:t>2 of 6</a:t>
+            </a:r>
+          </a:p>
+        </p:txBody>
+      </p:sp>
+      <p:sp>
+        <p:nvSpPr>
+          <p:cNvPr id="10" name="TextBox 9"/>
+          <p:cNvSpPr txBox="1"/>
+          <p:nvPr/>
+        </p:nvSpPr>
+        <p:spPr>
+          <a:xfrm>
+            <a:off x="694944" y="2359152"/>
+            <a:ext cx="2194560" cy="512064"/>
+          </a:xfrm>
+          <a:prstGeom prst="rect">
+            <a:avLst/>
+          </a:prstGeom>
+          <a:noFill/>
+        </p:spPr>
+        <p:txBody>
+          <a:bodyPr wrap="square" lIns="45720" rIns="45720" tIns="27432" bIns="27432" anchor="t">
+            <a:spAutoFit/>
+          </a:bodyPr>
+          <a:lstStyle/>
+          <a:p>
+            <a:r>
+              <a:rPr sz="1125" b="0" i="0">
                 <a:solidFill>
                   <a:srgbClr val="243447"/>
                 </a:solidFill>
                 <a:latin typeface="Aptos"/>
               </a:rPr>
-              <a:t>slower; run 3 seasons; use Replay in class</a:t>
-            </a:r>
-          </a:p>
-        </p:txBody>
-      </p:sp>
-      <p:sp>
-        <p:nvSpPr>
-          <p:cNvPr id="15" name="TextBox 14"/>
-          <p:cNvSpPr txBox="1"/>
-          <p:nvPr/>
-        </p:nvSpPr>
-        <p:spPr>
-          <a:xfrm>
-            <a:off x="7507224" y="2029967"/>
-            <a:ext cx="822960" cy="274320"/>
-          </a:xfrm>
-          <a:prstGeom prst="rect">
-            <a:avLst/>
-          </a:prstGeom>
-          <a:noFill/>
-        </p:spPr>
-        <p:txBody>
-          <a:bodyPr wrap="square" lIns="45720" rIns="45720" tIns="27432" bIns="27432" anchor="t">
-            <a:spAutoFit/>
-          </a:bodyPr>
-          <a:lstStyle/>
-          <a:p>
-            <a:r>
-              <a:rPr sz="1300" b="1" i="0">
-                <a:solidFill>
-                  <a:srgbClr val="002D72"/>
-                </a:solidFill>
-                <a:latin typeface="Georgia"/>
-              </a:rPr>
-              <a:t>16 GB</a:t>
-            </a:r>
-          </a:p>
-        </p:txBody>
-      </p:sp>
-      <p:sp>
-        <p:nvSpPr>
-          <p:cNvPr id="16" name="TextBox 15"/>
-          <p:cNvSpPr txBox="1"/>
-          <p:nvPr/>
-        </p:nvSpPr>
-        <p:spPr>
-          <a:xfrm>
-            <a:off x="8366760" y="2029967"/>
-            <a:ext cx="1280160" cy="274320"/>
-          </a:xfrm>
-          <a:prstGeom prst="rect">
-            <a:avLst/>
-          </a:prstGeom>
-          <a:noFill/>
-        </p:spPr>
-        <p:txBody>
-          <a:bodyPr wrap="square" lIns="45720" rIns="45720" tIns="27432" bIns="27432" anchor="t">
-            <a:spAutoFit/>
-          </a:bodyPr>
-          <a:lstStyle/>
-          <a:p>
-            <a:r>
-              <a:rPr sz="1100" b="1" i="0">
-                <a:solidFill>
-                  <a:srgbClr val="0B1F33"/>
-                </a:solidFill>
-                <a:latin typeface="Courier New"/>
-              </a:rPr>
-              <a:t>qwen3:8b</a:t>
-            </a:r>
-          </a:p>
-        </p:txBody>
-      </p:sp>
-      <p:sp>
-        <p:nvSpPr>
-          <p:cNvPr id="17" name="TextBox 16"/>
-          <p:cNvSpPr txBox="1"/>
-          <p:nvPr/>
-        </p:nvSpPr>
-        <p:spPr>
-          <a:xfrm>
-            <a:off x="8366760" y="2286000"/>
-            <a:ext cx="3200400" cy="329184"/>
-          </a:xfrm>
-          <a:prstGeom prst="rect">
-            <a:avLst/>
-          </a:prstGeom>
-          <a:noFill/>
-        </p:spPr>
-        <p:txBody>
-          <a:bodyPr wrap="square" lIns="45720" rIns="45720" tIns="27432" bIns="27432" anchor="t">
-            <a:spAutoFit/>
-          </a:bodyPr>
-          <a:lstStyle/>
-          <a:p>
-            <a:r>
-              <a:rPr sz="1000" b="0" i="0">
-                <a:solidFill>
-                  <a:srgbClr val="243447"/>
-                </a:solidFill>
-                <a:latin typeface="Aptos"/>
-              </a:rPr>
-              <a:t>the default, verified</a:t>
-            </a:r>
-          </a:p>
-        </p:txBody>
-      </p:sp>
-      <p:sp>
-        <p:nvSpPr>
-          <p:cNvPr id="18" name="TextBox 17"/>
-          <p:cNvSpPr txBox="1"/>
-          <p:nvPr/>
-        </p:nvSpPr>
-        <p:spPr>
-          <a:xfrm>
-            <a:off x="7507224" y="2670048"/>
-            <a:ext cx="822960" cy="274320"/>
-          </a:xfrm>
-          <a:prstGeom prst="rect">
-            <a:avLst/>
-          </a:prstGeom>
-          <a:noFill/>
-        </p:spPr>
-        <p:txBody>
-          <a:bodyPr wrap="square" lIns="45720" rIns="45720" tIns="27432" bIns="27432" anchor="t">
-            <a:spAutoFit/>
-          </a:bodyPr>
-          <a:lstStyle/>
-          <a:p>
-            <a:r>
-              <a:rPr sz="1300" b="1" i="0">
-                <a:solidFill>
-                  <a:srgbClr val="002D72"/>
-                </a:solidFill>
-                <a:latin typeface="Georgia"/>
-              </a:rPr>
-              <a:t>32 GB+</a:t>
-            </a:r>
-          </a:p>
-        </p:txBody>
-      </p:sp>
-      <p:sp>
-        <p:nvSpPr>
-          <p:cNvPr id="19" name="TextBox 18"/>
-          <p:cNvSpPr txBox="1"/>
-          <p:nvPr/>
-        </p:nvSpPr>
-        <p:spPr>
-          <a:xfrm>
-            <a:off x="8366760" y="2670048"/>
-            <a:ext cx="1280160" cy="274320"/>
-          </a:xfrm>
-          <a:prstGeom prst="rect">
-            <a:avLst/>
-          </a:prstGeom>
-          <a:noFill/>
-        </p:spPr>
-        <p:txBody>
-          <a:bodyPr wrap="square" lIns="45720" rIns="45720" tIns="27432" bIns="27432" anchor="t">
-            <a:spAutoFit/>
-          </a:bodyPr>
-          <a:lstStyle/>
-          <a:p>
-            <a:r>
-              <a:rPr sz="1100" b="1" i="0">
-                <a:solidFill>
-                  <a:srgbClr val="0B1F33"/>
-                </a:solidFill>
-                <a:latin typeface="Courier New"/>
-              </a:rPr>
-              <a:t>qwen3:14b</a:t>
-            </a:r>
-          </a:p>
-        </p:txBody>
-      </p:sp>
-      <p:sp>
-        <p:nvSpPr>
-          <p:cNvPr id="20" name="TextBox 19"/>
-          <p:cNvSpPr txBox="1"/>
-          <p:nvPr/>
-        </p:nvSpPr>
-        <p:spPr>
-          <a:xfrm>
-            <a:off x="8366760" y="2926080"/>
-            <a:ext cx="3200400" cy="329184"/>
-          </a:xfrm>
-          <a:prstGeom prst="rect">
-            <a:avLst/>
-          </a:prstGeom>
-          <a:noFill/>
-        </p:spPr>
-        <p:txBody>
-          <a:bodyPr wrap="square" lIns="45720" rIns="45720" tIns="27432" bIns="27432" anchor="t">
-            <a:spAutoFit/>
-          </a:bodyPr>
-          <a:lstStyle/>
-          <a:p>
-            <a:r>
-              <a:rPr sz="1000" b="0" i="0">
-                <a:solidFill>
-                  <a:srgbClr val="243447"/>
-                </a:solidFill>
-                <a:latin typeface="Aptos"/>
-              </a:rPr>
-              <a:t>better code, about twice as slow</a:t>
-            </a:r>
-          </a:p>
-        </p:txBody>
-      </p:sp>
-      <p:sp>
-        <p:nvSpPr>
-          <p:cNvPr id="21" name="TextBox 20"/>
-          <p:cNvSpPr txBox="1"/>
-          <p:nvPr/>
-        </p:nvSpPr>
-        <p:spPr>
-          <a:xfrm>
-            <a:off x="502920" y="3657600"/>
-            <a:ext cx="11183112" cy="228600"/>
-          </a:xfrm>
-          <a:prstGeom prst="rect">
-            <a:avLst/>
-          </a:prstGeom>
-          <a:noFill/>
-        </p:spPr>
-        <p:txBody>
-          <a:bodyPr wrap="square" lIns="45720" rIns="45720" tIns="27432" bIns="27432" anchor="t">
-            <a:spAutoFit/>
-          </a:bodyPr>
-          <a:lstStyle/>
-          <a:p>
-            <a:r>
-              <a:rPr sz="1050" b="1" i="0">
-                <a:solidFill>
-                  <a:srgbClr val="1769AA"/>
-                </a:solidFill>
-                <a:latin typeface="Aptos"/>
-              </a:rPr>
-              <a:t>IN THE REPO</a:t>
-            </a:r>
-          </a:p>
-        </p:txBody>
-      </p:sp>
-      <p:sp>
-        <p:nvSpPr>
-          <p:cNvPr id="22" name="Rounded Rectangle 21"/>
+              <a:t>seasons the team beat SPY</a:t>
+            </a:r>
+          </a:p>
+        </p:txBody>
+      </p:sp>
+      <p:sp>
+        <p:nvSpPr>
+          <p:cNvPr id="11" name="Rounded Rectangle 10"/>
           <p:cNvSpPr/>
           <p:nvPr/>
         </p:nvSpPr>
         <p:spPr>
           <a:xfrm>
-            <a:off x="502920" y="3977639"/>
-            <a:ext cx="5486400" cy="1024128"/>
+            <a:off x="3300984" y="1755648"/>
+            <a:ext cx="2569464" cy="1188720"/>
           </a:xfrm>
           <a:prstGeom prst="roundRect">
             <a:avLst>
@@ -15337,82 +14894,82 @@
       </p:sp>
       <p:sp>
         <p:nvSpPr>
-          <p:cNvPr id="23" name="TextBox 22"/>
-          <p:cNvSpPr txBox="1"/>
-          <p:nvPr/>
-        </p:nvSpPr>
-        <p:spPr>
-          <a:xfrm>
-            <a:off x="649224" y="4069079"/>
-            <a:ext cx="5212080" cy="274320"/>
-          </a:xfrm>
-          <a:prstGeom prst="rect">
-            <a:avLst/>
-          </a:prstGeom>
-          <a:noFill/>
-        </p:spPr>
-        <p:txBody>
-          <a:bodyPr wrap="square" lIns="45720" rIns="45720" tIns="27432" bIns="27432" anchor="t">
-            <a:spAutoFit/>
-          </a:bodyPr>
-          <a:lstStyle/>
-          <a:p>
-            <a:r>
-              <a:rPr sz="1200" b="1" i="0">
-                <a:solidFill>
-                  <a:srgbClr val="0B1F33"/>
-                </a:solidFill>
-                <a:latin typeface="Courier New"/>
-              </a:rPr>
-              <a:t>docs/superpowers/specs/</a:t>
-            </a:r>
-          </a:p>
-        </p:txBody>
-      </p:sp>
-      <p:sp>
-        <p:nvSpPr>
-          <p:cNvPr id="24" name="TextBox 23"/>
-          <p:cNvSpPr txBox="1"/>
-          <p:nvPr/>
-        </p:nvSpPr>
-        <p:spPr>
-          <a:xfrm>
-            <a:off x="649224" y="4379976"/>
-            <a:ext cx="5212080" cy="566928"/>
-          </a:xfrm>
-          <a:prstGeom prst="rect">
-            <a:avLst/>
-          </a:prstGeom>
-          <a:noFill/>
-        </p:spPr>
-        <p:txBody>
-          <a:bodyPr wrap="square" lIns="45720" rIns="45720" tIns="27432" bIns="27432" anchor="t">
-            <a:spAutoFit/>
-          </a:bodyPr>
-          <a:lstStyle/>
-          <a:p>
-            <a:r>
-              <a:rPr sz="1050" b="0" i="0">
+          <p:cNvPr id="12" name="TextBox 11"/>
+          <p:cNvSpPr txBox="1"/>
+          <p:nvPr/>
+        </p:nvSpPr>
+        <p:spPr>
+          <a:xfrm>
+            <a:off x="3493008" y="1865376"/>
+            <a:ext cx="2194560" cy="457200"/>
+          </a:xfrm>
+          <a:prstGeom prst="rect">
+            <a:avLst/>
+          </a:prstGeom>
+          <a:noFill/>
+        </p:spPr>
+        <p:txBody>
+          <a:bodyPr wrap="square" lIns="45720" rIns="45720" tIns="27432" bIns="27432" anchor="t">
+            <a:spAutoFit/>
+          </a:bodyPr>
+          <a:lstStyle/>
+          <a:p>
+            <a:r>
+              <a:rPr sz="2400" b="1" i="0">
+                <a:solidFill>
+                  <a:srgbClr val="002D72"/>
+                </a:solidFill>
+                <a:latin typeface="Georgia"/>
+              </a:rPr>
+              <a:t>+19.0%</a:t>
+            </a:r>
+          </a:p>
+        </p:txBody>
+      </p:sp>
+      <p:sp>
+        <p:nvSpPr>
+          <p:cNvPr id="13" name="TextBox 12"/>
+          <p:cNvSpPr txBox="1"/>
+          <p:nvPr/>
+        </p:nvSpPr>
+        <p:spPr>
+          <a:xfrm>
+            <a:off x="3493008" y="2359152"/>
+            <a:ext cx="2194560" cy="512064"/>
+          </a:xfrm>
+          <a:prstGeom prst="rect">
+            <a:avLst/>
+          </a:prstGeom>
+          <a:noFill/>
+        </p:spPr>
+        <p:txBody>
+          <a:bodyPr wrap="square" lIns="45720" rIns="45720" tIns="27432" bIns="27432" anchor="t">
+            <a:spAutoFit/>
+          </a:bodyPr>
+          <a:lstStyle/>
+          <a:p>
+            <a:r>
+              <a:rPr sz="1125" b="0" i="0">
                 <a:solidFill>
                   <a:srgbClr val="243447"/>
                 </a:solidFill>
                 <a:latin typeface="Aptos"/>
               </a:rPr>
-              <a:t>The full design: roles, phases, schemas, lever menu, budgets, error handling, test plan, two-day build schedule.</a:t>
-            </a:r>
-          </a:p>
-        </p:txBody>
-      </p:sp>
-      <p:sp>
-        <p:nvSpPr>
-          <p:cNvPr id="25" name="Rounded Rectangle 24"/>
+              <a:t>team, compounded over the run</a:t>
+            </a:r>
+          </a:p>
+        </p:txBody>
+      </p:sp>
+      <p:sp>
+        <p:nvSpPr>
+          <p:cNvPr id="14" name="Rounded Rectangle 13"/>
           <p:cNvSpPr/>
           <p:nvPr/>
         </p:nvSpPr>
         <p:spPr>
           <a:xfrm>
-            <a:off x="6199632" y="3977639"/>
-            <a:ext cx="5486400" cy="1024128"/>
+            <a:off x="6099048" y="1755648"/>
+            <a:ext cx="2569464" cy="1188720"/>
           </a:xfrm>
           <a:prstGeom prst="roundRect">
             <a:avLst>
@@ -15453,82 +15010,82 @@
       </p:sp>
       <p:sp>
         <p:nvSpPr>
-          <p:cNvPr id="26" name="TextBox 25"/>
-          <p:cNvSpPr txBox="1"/>
-          <p:nvPr/>
-        </p:nvSpPr>
-        <p:spPr>
-          <a:xfrm>
-            <a:off x="6345936" y="4069079"/>
-            <a:ext cx="5212080" cy="274320"/>
-          </a:xfrm>
-          <a:prstGeom prst="rect">
-            <a:avLst/>
-          </a:prstGeom>
-          <a:noFill/>
-        </p:spPr>
-        <p:txBody>
-          <a:bodyPr wrap="square" lIns="45720" rIns="45720" tIns="27432" bIns="27432" anchor="t">
-            <a:spAutoFit/>
-          </a:bodyPr>
-          <a:lstStyle/>
-          <a:p>
-            <a:r>
-              <a:rPr sz="1200" b="1" i="0">
-                <a:solidFill>
-                  <a:srgbClr val="0B1F33"/>
-                </a:solidFill>
-                <a:latin typeface="Courier New"/>
-              </a:rPr>
-              <a:t>docs/mockups/mission-control.html</a:t>
-            </a:r>
-          </a:p>
-        </p:txBody>
-      </p:sp>
-      <p:sp>
-        <p:nvSpPr>
-          <p:cNvPr id="27" name="TextBox 26"/>
-          <p:cNvSpPr txBox="1"/>
-          <p:nvPr/>
-        </p:nvSpPr>
-        <p:spPr>
-          <a:xfrm>
-            <a:off x="6345936" y="4379976"/>
-            <a:ext cx="5212080" cy="566928"/>
-          </a:xfrm>
-          <a:prstGeom prst="rect">
-            <a:avLst/>
-          </a:prstGeom>
-          <a:noFill/>
-        </p:spPr>
-        <p:txBody>
-          <a:bodyPr wrap="square" lIns="45720" rIns="45720" tIns="27432" bIns="27432" anchor="t">
-            <a:spAutoFit/>
-          </a:bodyPr>
-          <a:lstStyle/>
-          <a:p>
-            <a:r>
-              <a:rPr sz="1050" b="0" i="0">
+          <p:cNvPr id="15" name="TextBox 14"/>
+          <p:cNvSpPr txBox="1"/>
+          <p:nvPr/>
+        </p:nvSpPr>
+        <p:spPr>
+          <a:xfrm>
+            <a:off x="6291072" y="1865376"/>
+            <a:ext cx="2194560" cy="457200"/>
+          </a:xfrm>
+          <a:prstGeom prst="rect">
+            <a:avLst/>
+          </a:prstGeom>
+          <a:noFill/>
+        </p:spPr>
+        <p:txBody>
+          <a:bodyPr wrap="square" lIns="45720" rIns="45720" tIns="27432" bIns="27432" anchor="t">
+            <a:spAutoFit/>
+          </a:bodyPr>
+          <a:lstStyle/>
+          <a:p>
+            <a:r>
+              <a:rPr sz="2400" b="1" i="0">
+                <a:solidFill>
+                  <a:srgbClr val="002D72"/>
+                </a:solidFill>
+                <a:latin typeface="Georgia"/>
+              </a:rPr>
+              <a:t>+29.6%</a:t>
+            </a:r>
+          </a:p>
+        </p:txBody>
+      </p:sp>
+      <p:sp>
+        <p:nvSpPr>
+          <p:cNvPr id="16" name="TextBox 15"/>
+          <p:cNvSpPr txBox="1"/>
+          <p:nvPr/>
+        </p:nvSpPr>
+        <p:spPr>
+          <a:xfrm>
+            <a:off x="6291072" y="2359152"/>
+            <a:ext cx="2194560" cy="512064"/>
+          </a:xfrm>
+          <a:prstGeom prst="rect">
+            <a:avLst/>
+          </a:prstGeom>
+          <a:noFill/>
+        </p:spPr>
+        <p:txBody>
+          <a:bodyPr wrap="square" lIns="45720" rIns="45720" tIns="27432" bIns="27432" anchor="t">
+            <a:spAutoFit/>
+          </a:bodyPr>
+          <a:lstStyle/>
+          <a:p>
+            <a:r>
+              <a:rPr sz="1125" b="0" i="0">
                 <a:solidFill>
                   <a:srgbClr val="243447"/>
                 </a:solidFill>
                 <a:latin typeface="Aptos"/>
               </a:rPr>
-              <a:t>The dashboard you just saw. One file, open it in any browser, no server needed.</a:t>
-            </a:r>
-          </a:p>
-        </p:txBody>
-      </p:sp>
-      <p:sp>
-        <p:nvSpPr>
-          <p:cNvPr id="28" name="Rounded Rectangle 27"/>
+              <a:t>SPY over the same quarters</a:t>
+            </a:r>
+          </a:p>
+        </p:txBody>
+      </p:sp>
+      <p:sp>
+        <p:nvSpPr>
+          <p:cNvPr id="17" name="Rounded Rectangle 16"/>
           <p:cNvSpPr/>
           <p:nvPr/>
         </p:nvSpPr>
         <p:spPr>
           <a:xfrm>
-            <a:off x="502920" y="5120640"/>
-            <a:ext cx="5486400" cy="1024128"/>
+            <a:off x="8897112" y="1755648"/>
+            <a:ext cx="2569464" cy="1188720"/>
           </a:xfrm>
           <a:prstGeom prst="roundRect">
             <a:avLst>
@@ -15569,34 +15126,414 @@
       </p:sp>
       <p:sp>
         <p:nvSpPr>
+          <p:cNvPr id="18" name="TextBox 17"/>
+          <p:cNvSpPr txBox="1"/>
+          <p:nvPr/>
+        </p:nvSpPr>
+        <p:spPr>
+          <a:xfrm>
+            <a:off x="9089136" y="1865376"/>
+            <a:ext cx="2194560" cy="457200"/>
+          </a:xfrm>
+          <a:prstGeom prst="rect">
+            <a:avLst/>
+          </a:prstGeom>
+          <a:noFill/>
+        </p:spPr>
+        <p:txBody>
+          <a:bodyPr wrap="square" lIns="45720" rIns="45720" tIns="27432" bIns="27432" anchor="t">
+            <a:spAutoFit/>
+          </a:bodyPr>
+          <a:lstStyle/>
+          <a:p>
+            <a:r>
+              <a:rPr sz="2400" b="1" i="0">
+                <a:solidFill>
+                  <a:srgbClr val="002D72"/>
+                </a:solidFill>
+                <a:latin typeface="Georgia"/>
+              </a:rPr>
+              <a:t>+30.7%</a:t>
+            </a:r>
+          </a:p>
+        </p:txBody>
+      </p:sp>
+      <p:sp>
+        <p:nvSpPr>
+          <p:cNvPr id="19" name="TextBox 18"/>
+          <p:cNvSpPr txBox="1"/>
+          <p:nvPr/>
+        </p:nvSpPr>
+        <p:spPr>
+          <a:xfrm>
+            <a:off x="9089136" y="2359152"/>
+            <a:ext cx="2194560" cy="512064"/>
+          </a:xfrm>
+          <a:prstGeom prst="rect">
+            <a:avLst/>
+          </a:prstGeom>
+          <a:noFill/>
+        </p:spPr>
+        <p:txBody>
+          <a:bodyPr wrap="square" lIns="45720" rIns="45720" tIns="27432" bIns="27432" anchor="t">
+            <a:spAutoFit/>
+          </a:bodyPr>
+          <a:lstStyle/>
+          <a:p>
+            <a:r>
+              <a:rPr sz="1125" b="0" i="0">
+                <a:solidFill>
+                  <a:srgbClr val="243447"/>
+                </a:solidFill>
+                <a:latin typeface="Aptos"/>
+              </a:rPr>
+              <a:t>quant book alone</a:t>
+            </a:r>
+          </a:p>
+        </p:txBody>
+      </p:sp>
+      <p:sp>
+        <p:nvSpPr>
+          <p:cNvPr id="20" name="TextBox 19"/>
+          <p:cNvSpPr txBox="1"/>
+          <p:nvPr/>
+        </p:nvSpPr>
+        <p:spPr>
+          <a:xfrm>
+            <a:off x="502920" y="3200400"/>
+            <a:ext cx="1463040" cy="274320"/>
+          </a:xfrm>
+          <a:prstGeom prst="rect">
+            <a:avLst/>
+          </a:prstGeom>
+          <a:noFill/>
+        </p:spPr>
+        <p:txBody>
+          <a:bodyPr wrap="square" lIns="45720" rIns="45720" tIns="27432" bIns="27432" anchor="t">
+            <a:spAutoFit/>
+          </a:bodyPr>
+          <a:lstStyle/>
+          <a:p>
+            <a:r>
+              <a:rPr sz="1050" b="1" i="0">
+                <a:solidFill>
+                  <a:srgbClr val="667085"/>
+                </a:solidFill>
+                <a:latin typeface="Aptos"/>
+              </a:rPr>
+              <a:t>Season</a:t>
+            </a:r>
+          </a:p>
+        </p:txBody>
+      </p:sp>
+      <p:sp>
+        <p:nvSpPr>
+          <p:cNvPr id="21" name="TextBox 20"/>
+          <p:cNvSpPr txBox="1"/>
+          <p:nvPr/>
+        </p:nvSpPr>
+        <p:spPr>
+          <a:xfrm>
+            <a:off x="1965960" y="3200400"/>
+            <a:ext cx="2377440" cy="274320"/>
+          </a:xfrm>
+          <a:prstGeom prst="rect">
+            <a:avLst/>
+          </a:prstGeom>
+          <a:noFill/>
+        </p:spPr>
+        <p:txBody>
+          <a:bodyPr wrap="square" lIns="45720" rIns="45720" tIns="27432" bIns="27432" anchor="t">
+            <a:spAutoFit/>
+          </a:bodyPr>
+          <a:lstStyle/>
+          <a:p>
+            <a:r>
+              <a:rPr sz="1050" b="1" i="0">
+                <a:solidFill>
+                  <a:srgbClr val="667085"/>
+                </a:solidFill>
+                <a:latin typeface="Aptos"/>
+              </a:rPr>
+              <a:t>Quant book</a:t>
+            </a:r>
+          </a:p>
+        </p:txBody>
+      </p:sp>
+      <p:sp>
+        <p:nvSpPr>
+          <p:cNvPr id="22" name="TextBox 21"/>
+          <p:cNvSpPr txBox="1"/>
+          <p:nvPr/>
+        </p:nvSpPr>
+        <p:spPr>
+          <a:xfrm>
+            <a:off x="4343400" y="3200400"/>
+            <a:ext cx="1005840" cy="274320"/>
+          </a:xfrm>
+          <a:prstGeom prst="rect">
+            <a:avLst/>
+          </a:prstGeom>
+          <a:noFill/>
+        </p:spPr>
+        <p:txBody>
+          <a:bodyPr wrap="square" lIns="45720" rIns="45720" tIns="27432" bIns="27432" anchor="t">
+            <a:spAutoFit/>
+          </a:bodyPr>
+          <a:lstStyle/>
+          <a:p>
+            <a:pPr algn="r"/>
+            <a:r>
+              <a:rPr sz="1050" b="1" i="0">
+                <a:solidFill>
+                  <a:srgbClr val="667085"/>
+                </a:solidFill>
+                <a:latin typeface="Aptos"/>
+              </a:rPr>
+              <a:t>Val Sharpe</a:t>
+            </a:r>
+          </a:p>
+        </p:txBody>
+      </p:sp>
+      <p:sp>
+        <p:nvSpPr>
+          <p:cNvPr id="23" name="TextBox 22"/>
+          <p:cNvSpPr txBox="1"/>
+          <p:nvPr/>
+        </p:nvSpPr>
+        <p:spPr>
+          <a:xfrm>
+            <a:off x="5349240" y="3200400"/>
+            <a:ext cx="1188720" cy="274320"/>
+          </a:xfrm>
+          <a:prstGeom prst="rect">
+            <a:avLst/>
+          </a:prstGeom>
+          <a:noFill/>
+        </p:spPr>
+        <p:txBody>
+          <a:bodyPr wrap="square" lIns="45720" rIns="45720" tIns="27432" bIns="27432" anchor="t">
+            <a:spAutoFit/>
+          </a:bodyPr>
+          <a:lstStyle/>
+          <a:p>
+            <a:pPr algn="r"/>
+            <a:r>
+              <a:rPr sz="1050" b="1" i="0">
+                <a:solidFill>
+                  <a:srgbClr val="667085"/>
+                </a:solidFill>
+                <a:latin typeface="Aptos"/>
+              </a:rPr>
+              <a:t>Season Sharpe</a:t>
+            </a:r>
+          </a:p>
+        </p:txBody>
+      </p:sp>
+      <p:sp>
+        <p:nvSpPr>
+          <p:cNvPr id="24" name="TextBox 23"/>
+          <p:cNvSpPr txBox="1"/>
+          <p:nvPr/>
+        </p:nvSpPr>
+        <p:spPr>
+          <a:xfrm>
+            <a:off x="6537959" y="3200400"/>
+            <a:ext cx="914400" cy="274320"/>
+          </a:xfrm>
+          <a:prstGeom prst="rect">
+            <a:avLst/>
+          </a:prstGeom>
+          <a:noFill/>
+        </p:spPr>
+        <p:txBody>
+          <a:bodyPr wrap="square" lIns="45720" rIns="45720" tIns="27432" bIns="27432" anchor="t">
+            <a:spAutoFit/>
+          </a:bodyPr>
+          <a:lstStyle/>
+          <a:p>
+            <a:pPr algn="r"/>
+            <a:r>
+              <a:rPr sz="1050" b="1" i="0">
+                <a:solidFill>
+                  <a:srgbClr val="667085"/>
+                </a:solidFill>
+                <a:latin typeface="Aptos"/>
+              </a:rPr>
+              <a:t>Team</a:t>
+            </a:r>
+          </a:p>
+        </p:txBody>
+      </p:sp>
+      <p:sp>
+        <p:nvSpPr>
+          <p:cNvPr id="25" name="TextBox 24"/>
+          <p:cNvSpPr txBox="1"/>
+          <p:nvPr/>
+        </p:nvSpPr>
+        <p:spPr>
+          <a:xfrm>
+            <a:off x="7452359" y="3200400"/>
+            <a:ext cx="914400" cy="274320"/>
+          </a:xfrm>
+          <a:prstGeom prst="rect">
+            <a:avLst/>
+          </a:prstGeom>
+          <a:noFill/>
+        </p:spPr>
+        <p:txBody>
+          <a:bodyPr wrap="square" lIns="45720" rIns="45720" tIns="27432" bIns="27432" anchor="t">
+            <a:spAutoFit/>
+          </a:bodyPr>
+          <a:lstStyle/>
+          <a:p>
+            <a:pPr algn="r"/>
+            <a:r>
+              <a:rPr sz="1050" b="1" i="0">
+                <a:solidFill>
+                  <a:srgbClr val="667085"/>
+                </a:solidFill>
+                <a:latin typeface="Aptos"/>
+              </a:rPr>
+              <a:t>SPY</a:t>
+            </a:r>
+          </a:p>
+        </p:txBody>
+      </p:sp>
+      <p:sp>
+        <p:nvSpPr>
+          <p:cNvPr id="26" name="TextBox 25"/>
+          <p:cNvSpPr txBox="1"/>
+          <p:nvPr/>
+        </p:nvSpPr>
+        <p:spPr>
+          <a:xfrm>
+            <a:off x="8366759" y="3200400"/>
+            <a:ext cx="914400" cy="274320"/>
+          </a:xfrm>
+          <a:prstGeom prst="rect">
+            <a:avLst/>
+          </a:prstGeom>
+          <a:noFill/>
+        </p:spPr>
+        <p:txBody>
+          <a:bodyPr wrap="square" lIns="45720" rIns="45720" tIns="27432" bIns="27432" anchor="t">
+            <a:spAutoFit/>
+          </a:bodyPr>
+          <a:lstStyle/>
+          <a:p>
+            <a:pPr algn="r"/>
+            <a:r>
+              <a:rPr sz="1050" b="1" i="0">
+                <a:solidFill>
+                  <a:srgbClr val="667085"/>
+                </a:solidFill>
+                <a:latin typeface="Aptos"/>
+              </a:rPr>
+              <a:t>Excess</a:t>
+            </a:r>
+          </a:p>
+        </p:txBody>
+      </p:sp>
+      <p:sp>
+        <p:nvSpPr>
+          <p:cNvPr id="27" name="TextBox 26"/>
+          <p:cNvSpPr txBox="1"/>
+          <p:nvPr/>
+        </p:nvSpPr>
+        <p:spPr>
+          <a:xfrm>
+            <a:off x="9281159" y="3200400"/>
+            <a:ext cx="914400" cy="274320"/>
+          </a:xfrm>
+          <a:prstGeom prst="rect">
+            <a:avLst/>
+          </a:prstGeom>
+          <a:noFill/>
+        </p:spPr>
+        <p:txBody>
+          <a:bodyPr wrap="square" lIns="45720" rIns="45720" tIns="27432" bIns="27432" anchor="t">
+            <a:spAutoFit/>
+          </a:bodyPr>
+          <a:lstStyle/>
+          <a:p>
+            <a:pPr algn="r"/>
+            <a:r>
+              <a:rPr sz="1050" b="1" i="0">
+                <a:solidFill>
+                  <a:srgbClr val="667085"/>
+                </a:solidFill>
+                <a:latin typeface="Aptos"/>
+              </a:rPr>
+              <a:t>Desk</a:t>
+            </a:r>
+          </a:p>
+        </p:txBody>
+      </p:sp>
+      <p:sp>
+        <p:nvSpPr>
+          <p:cNvPr id="28" name="TextBox 27"/>
+          <p:cNvSpPr txBox="1"/>
+          <p:nvPr/>
+        </p:nvSpPr>
+        <p:spPr>
+          <a:xfrm>
+            <a:off x="10195559" y="3200400"/>
+            <a:ext cx="1463040" cy="274320"/>
+          </a:xfrm>
+          <a:prstGeom prst="rect">
+            <a:avLst/>
+          </a:prstGeom>
+          <a:noFill/>
+        </p:spPr>
+        <p:txBody>
+          <a:bodyPr wrap="square" lIns="45720" rIns="45720" tIns="27432" bIns="27432" anchor="t">
+            <a:spAutoFit/>
+          </a:bodyPr>
+          <a:lstStyle/>
+          <a:p>
+            <a:r>
+              <a:rPr sz="1050" b="1" i="0">
+                <a:solidFill>
+                  <a:srgbClr val="667085"/>
+                </a:solidFill>
+                <a:latin typeface="Aptos"/>
+              </a:rPr>
+              <a:t>Changes after</a:t>
+            </a:r>
+          </a:p>
+        </p:txBody>
+      </p:sp>
+      <p:sp>
+        <p:nvSpPr>
           <p:cNvPr id="29" name="TextBox 28"/>
           <p:cNvSpPr txBox="1"/>
           <p:nvPr/>
         </p:nvSpPr>
         <p:spPr>
           <a:xfrm>
-            <a:off x="649224" y="5212079"/>
-            <a:ext cx="5212080" cy="274320"/>
-          </a:xfrm>
-          <a:prstGeom prst="rect">
-            <a:avLst/>
-          </a:prstGeom>
-          <a:noFill/>
-        </p:spPr>
-        <p:txBody>
-          <a:bodyPr wrap="square" lIns="45720" rIns="45720" tIns="27432" bIns="27432" anchor="t">
-            <a:spAutoFit/>
-          </a:bodyPr>
-          <a:lstStyle/>
-          <a:p>
-            <a:r>
-              <a:rPr sz="1200" b="1" i="0">
-                <a:solidFill>
-                  <a:srgbClr val="0B1F33"/>
-                </a:solidFill>
-                <a:latin typeface="Courier New"/>
-              </a:rPr>
-              <a:t>docs/slides/</a:t>
+            <a:off x="502920" y="3511296"/>
+            <a:ext cx="1463040" cy="274320"/>
+          </a:xfrm>
+          <a:prstGeom prst="rect">
+            <a:avLst/>
+          </a:prstGeom>
+          <a:noFill/>
+        </p:spPr>
+        <p:txBody>
+          <a:bodyPr wrap="square" lIns="45720" rIns="45720" tIns="27432" bIns="27432" anchor="t">
+            <a:spAutoFit/>
+          </a:bodyPr>
+          <a:lstStyle/>
+          <a:p>
+            <a:r>
+              <a:rPr sz="1100" b="0" i="0">
+                <a:solidFill>
+                  <a:srgbClr val="243447"/>
+                </a:solidFill>
+                <a:latin typeface="Aptos"/>
+              </a:rPr>
+              <a:t>S1, 2025 Q1</a:t>
             </a:r>
           </a:p>
         </p:txBody>
@@ -15609,50 +15546,1854 @@
         </p:nvSpPr>
         <p:spPr>
           <a:xfrm>
-            <a:off x="649224" y="5522976"/>
-            <a:ext cx="5212080" cy="566928"/>
-          </a:xfrm>
-          <a:prstGeom prst="rect">
-            <a:avLst/>
-          </a:prstGeom>
-          <a:noFill/>
-        </p:spPr>
-        <p:txBody>
-          <a:bodyPr wrap="square" lIns="45720" rIns="45720" tIns="27432" bIns="27432" anchor="t">
-            <a:spAutoFit/>
-          </a:bodyPr>
-          <a:lstStyle/>
-          <a:p>
-            <a:r>
-              <a:rPr sz="1050" b="0" i="0">
+            <a:off x="1965960" y="3511296"/>
+            <a:ext cx="2377440" cy="274320"/>
+          </a:xfrm>
+          <a:prstGeom prst="rect">
+            <a:avLst/>
+          </a:prstGeom>
+          <a:noFill/>
+        </p:spPr>
+        <p:txBody>
+          <a:bodyPr wrap="square" lIns="45720" rIns="45720" tIns="27432" bIns="27432" anchor="t">
+            <a:spAutoFit/>
+          </a:bodyPr>
+          <a:lstStyle/>
+          <a:p>
+            <a:r>
+              <a:rPr sz="1100" b="0" i="0">
                 <a:solidFill>
                   <a:srgbClr val="243447"/>
                 </a:solidFill>
                 <a:latin typeface="Aptos"/>
               </a:rPr>
-              <a:t>This section of the deck as its own PowerPoint and PDF, so you can reuse it.</a:t>
-            </a:r>
-          </a:p>
-        </p:txBody>
-      </p:sp>
-      <p:sp>
-        <p:nvSpPr>
-          <p:cNvPr id="31" name="Rounded Rectangle 30"/>
+              <a:t>equal_weight</a:t>
+            </a:r>
+          </a:p>
+        </p:txBody>
+      </p:sp>
+      <p:sp>
+        <p:nvSpPr>
+          <p:cNvPr id="31" name="TextBox 30"/>
+          <p:cNvSpPr txBox="1"/>
+          <p:nvPr/>
+        </p:nvSpPr>
+        <p:spPr>
+          <a:xfrm>
+            <a:off x="4343400" y="3511296"/>
+            <a:ext cx="1005840" cy="274320"/>
+          </a:xfrm>
+          <a:prstGeom prst="rect">
+            <a:avLst/>
+          </a:prstGeom>
+          <a:noFill/>
+        </p:spPr>
+        <p:txBody>
+          <a:bodyPr wrap="square" lIns="45720" rIns="45720" tIns="27432" bIns="27432" anchor="t">
+            <a:spAutoFit/>
+          </a:bodyPr>
+          <a:lstStyle/>
+          <a:p>
+            <a:pPr algn="r"/>
+            <a:r>
+              <a:rPr sz="1100" b="0" i="0">
+                <a:solidFill>
+                  <a:srgbClr val="243447"/>
+                </a:solidFill>
+                <a:latin typeface="Aptos"/>
+              </a:rPr>
+              <a:t>2.03</a:t>
+            </a:r>
+          </a:p>
+        </p:txBody>
+      </p:sp>
+      <p:sp>
+        <p:nvSpPr>
+          <p:cNvPr id="32" name="TextBox 31"/>
+          <p:cNvSpPr txBox="1"/>
+          <p:nvPr/>
+        </p:nvSpPr>
+        <p:spPr>
+          <a:xfrm>
+            <a:off x="5349240" y="3511296"/>
+            <a:ext cx="1188720" cy="274320"/>
+          </a:xfrm>
+          <a:prstGeom prst="rect">
+            <a:avLst/>
+          </a:prstGeom>
+          <a:noFill/>
+        </p:spPr>
+        <p:txBody>
+          <a:bodyPr wrap="square" lIns="45720" rIns="45720" tIns="27432" bIns="27432" anchor="t">
+            <a:spAutoFit/>
+          </a:bodyPr>
+          <a:lstStyle/>
+          <a:p>
+            <a:pPr algn="r"/>
+            <a:r>
+              <a:rPr sz="1100" b="0" i="0">
+                <a:solidFill>
+                  <a:srgbClr val="243447"/>
+                </a:solidFill>
+                <a:latin typeface="Aptos"/>
+              </a:rPr>
+              <a:t>-2.00</a:t>
+            </a:r>
+          </a:p>
+        </p:txBody>
+      </p:sp>
+      <p:sp>
+        <p:nvSpPr>
+          <p:cNvPr id="33" name="TextBox 32"/>
+          <p:cNvSpPr txBox="1"/>
+          <p:nvPr/>
+        </p:nvSpPr>
+        <p:spPr>
+          <a:xfrm>
+            <a:off x="6537959" y="3511296"/>
+            <a:ext cx="914400" cy="274320"/>
+          </a:xfrm>
+          <a:prstGeom prst="rect">
+            <a:avLst/>
+          </a:prstGeom>
+          <a:noFill/>
+        </p:spPr>
+        <p:txBody>
+          <a:bodyPr wrap="square" lIns="45720" rIns="45720" tIns="27432" bIns="27432" anchor="t">
+            <a:spAutoFit/>
+          </a:bodyPr>
+          <a:lstStyle/>
+          <a:p>
+            <a:pPr algn="r"/>
+            <a:r>
+              <a:rPr sz="1100" b="0" i="0">
+                <a:solidFill>
+                  <a:srgbClr val="243447"/>
+                </a:solidFill>
+                <a:latin typeface="Aptos"/>
+              </a:rPr>
+              <a:t>−16.1%</a:t>
+            </a:r>
+          </a:p>
+        </p:txBody>
+      </p:sp>
+      <p:sp>
+        <p:nvSpPr>
+          <p:cNvPr id="34" name="TextBox 33"/>
+          <p:cNvSpPr txBox="1"/>
+          <p:nvPr/>
+        </p:nvSpPr>
+        <p:spPr>
+          <a:xfrm>
+            <a:off x="7452359" y="3511296"/>
+            <a:ext cx="914400" cy="274320"/>
+          </a:xfrm>
+          <a:prstGeom prst="rect">
+            <a:avLst/>
+          </a:prstGeom>
+          <a:noFill/>
+        </p:spPr>
+        <p:txBody>
+          <a:bodyPr wrap="square" lIns="45720" rIns="45720" tIns="27432" bIns="27432" anchor="t">
+            <a:spAutoFit/>
+          </a:bodyPr>
+          <a:lstStyle/>
+          <a:p>
+            <a:pPr algn="r"/>
+            <a:r>
+              <a:rPr sz="1100" b="0" i="0">
+                <a:solidFill>
+                  <a:srgbClr val="243447"/>
+                </a:solidFill>
+                <a:latin typeface="Aptos"/>
+              </a:rPr>
+              <a:t>−4.3%</a:t>
+            </a:r>
+          </a:p>
+        </p:txBody>
+      </p:sp>
+      <p:sp>
+        <p:nvSpPr>
+          <p:cNvPr id="35" name="TextBox 34"/>
+          <p:cNvSpPr txBox="1"/>
+          <p:nvPr/>
+        </p:nvSpPr>
+        <p:spPr>
+          <a:xfrm>
+            <a:off x="8366759" y="3511296"/>
+            <a:ext cx="914400" cy="274320"/>
+          </a:xfrm>
+          <a:prstGeom prst="rect">
+            <a:avLst/>
+          </a:prstGeom>
+          <a:noFill/>
+        </p:spPr>
+        <p:txBody>
+          <a:bodyPr wrap="square" lIns="45720" rIns="45720" tIns="27432" bIns="27432" anchor="t">
+            <a:spAutoFit/>
+          </a:bodyPr>
+          <a:lstStyle/>
+          <a:p>
+            <a:pPr algn="r"/>
+            <a:r>
+              <a:rPr sz="1100" b="0" i="0">
+                <a:solidFill>
+                  <a:srgbClr val="243447"/>
+                </a:solidFill>
+                <a:latin typeface="Aptos"/>
+              </a:rPr>
+              <a:t>−11.8%</a:t>
+            </a:r>
+          </a:p>
+        </p:txBody>
+      </p:sp>
+      <p:sp>
+        <p:nvSpPr>
+          <p:cNvPr id="36" name="TextBox 35"/>
+          <p:cNvSpPr txBox="1"/>
+          <p:nvPr/>
+        </p:nvSpPr>
+        <p:spPr>
+          <a:xfrm>
+            <a:off x="9281159" y="3511296"/>
+            <a:ext cx="914400" cy="274320"/>
+          </a:xfrm>
+          <a:prstGeom prst="rect">
+            <a:avLst/>
+          </a:prstGeom>
+          <a:noFill/>
+        </p:spPr>
+        <p:txBody>
+          <a:bodyPr wrap="square" lIns="45720" rIns="45720" tIns="27432" bIns="27432" anchor="t">
+            <a:spAutoFit/>
+          </a:bodyPr>
+          <a:lstStyle/>
+          <a:p>
+            <a:pPr algn="r"/>
+            <a:r>
+              <a:rPr sz="1100" b="0" i="0">
+                <a:solidFill>
+                  <a:srgbClr val="243447"/>
+                </a:solidFill>
+                <a:latin typeface="Aptos"/>
+              </a:rPr>
+              <a:t>−17.4%</a:t>
+            </a:r>
+          </a:p>
+        </p:txBody>
+      </p:sp>
+      <p:sp>
+        <p:nvSpPr>
+          <p:cNvPr id="37" name="TextBox 36"/>
+          <p:cNvSpPr txBox="1"/>
+          <p:nvPr/>
+        </p:nvSpPr>
+        <p:spPr>
+          <a:xfrm>
+            <a:off x="10195559" y="3511296"/>
+            <a:ext cx="1463040" cy="274320"/>
+          </a:xfrm>
+          <a:prstGeom prst="rect">
+            <a:avLst/>
+          </a:prstGeom>
+          <a:noFill/>
+        </p:spPr>
+        <p:txBody>
+          <a:bodyPr wrap="square" lIns="45720" rIns="45720" tIns="27432" bIns="27432" anchor="t">
+            <a:spAutoFit/>
+          </a:bodyPr>
+          <a:lstStyle/>
+          <a:p>
+            <a:r>
+              <a:rPr sz="1100" b="0" i="0">
+                <a:solidFill>
+                  <a:srgbClr val="243447"/>
+                </a:solidFill>
+                <a:latin typeface="Aptos"/>
+              </a:rPr>
+              <a:t>1, 2</a:t>
+            </a:r>
+          </a:p>
+        </p:txBody>
+      </p:sp>
+      <p:sp>
+        <p:nvSpPr>
+          <p:cNvPr id="38" name="TextBox 37"/>
+          <p:cNvSpPr txBox="1"/>
+          <p:nvPr/>
+        </p:nvSpPr>
+        <p:spPr>
+          <a:xfrm>
+            <a:off x="502920" y="3803904"/>
+            <a:ext cx="1463040" cy="274320"/>
+          </a:xfrm>
+          <a:prstGeom prst="rect">
+            <a:avLst/>
+          </a:prstGeom>
+          <a:noFill/>
+        </p:spPr>
+        <p:txBody>
+          <a:bodyPr wrap="square" lIns="45720" rIns="45720" tIns="27432" bIns="27432" anchor="t">
+            <a:spAutoFit/>
+          </a:bodyPr>
+          <a:lstStyle/>
+          <a:p>
+            <a:r>
+              <a:rPr sz="1100" b="0" i="0">
+                <a:solidFill>
+                  <a:srgbClr val="243447"/>
+                </a:solidFill>
+                <a:latin typeface="Aptos"/>
+              </a:rPr>
+              <a:t>S2, 2025 Q2</a:t>
+            </a:r>
+          </a:p>
+        </p:txBody>
+      </p:sp>
+      <p:sp>
+        <p:nvSpPr>
+          <p:cNvPr id="39" name="TextBox 38"/>
+          <p:cNvSpPr txBox="1"/>
+          <p:nvPr/>
+        </p:nvSpPr>
+        <p:spPr>
+          <a:xfrm>
+            <a:off x="1965960" y="3803904"/>
+            <a:ext cx="2377440" cy="274320"/>
+          </a:xfrm>
+          <a:prstGeom prst="rect">
+            <a:avLst/>
+          </a:prstGeom>
+          <a:noFill/>
+        </p:spPr>
+        <p:txBody>
+          <a:bodyPr wrap="square" lIns="45720" rIns="45720" tIns="27432" bIns="27432" anchor="t">
+            <a:spAutoFit/>
+          </a:bodyPr>
+          <a:lstStyle/>
+          <a:p>
+            <a:r>
+              <a:rPr sz="1100" b="0" i="0">
+                <a:solidFill>
+                  <a:srgbClr val="243447"/>
+                </a:solidFill>
+                <a:latin typeface="Aptos"/>
+              </a:rPr>
+              <a:t>equal_weight</a:t>
+            </a:r>
+          </a:p>
+        </p:txBody>
+      </p:sp>
+      <p:sp>
+        <p:nvSpPr>
+          <p:cNvPr id="40" name="TextBox 39"/>
+          <p:cNvSpPr txBox="1"/>
+          <p:nvPr/>
+        </p:nvSpPr>
+        <p:spPr>
+          <a:xfrm>
+            <a:off x="4343400" y="3803904"/>
+            <a:ext cx="1005840" cy="274320"/>
+          </a:xfrm>
+          <a:prstGeom prst="rect">
+            <a:avLst/>
+          </a:prstGeom>
+          <a:noFill/>
+        </p:spPr>
+        <p:txBody>
+          <a:bodyPr wrap="square" lIns="45720" rIns="45720" tIns="27432" bIns="27432" anchor="t">
+            <a:spAutoFit/>
+          </a:bodyPr>
+          <a:lstStyle/>
+          <a:p>
+            <a:pPr algn="r"/>
+            <a:r>
+              <a:rPr sz="1100" b="0" i="0">
+                <a:solidFill>
+                  <a:srgbClr val="243447"/>
+                </a:solidFill>
+                <a:latin typeface="Aptos"/>
+              </a:rPr>
+              <a:t>0.68</a:t>
+            </a:r>
+          </a:p>
+        </p:txBody>
+      </p:sp>
+      <p:sp>
+        <p:nvSpPr>
+          <p:cNvPr id="41" name="TextBox 40"/>
+          <p:cNvSpPr txBox="1"/>
+          <p:nvPr/>
+        </p:nvSpPr>
+        <p:spPr>
+          <a:xfrm>
+            <a:off x="5349240" y="3803904"/>
+            <a:ext cx="1188720" cy="274320"/>
+          </a:xfrm>
+          <a:prstGeom prst="rect">
+            <a:avLst/>
+          </a:prstGeom>
+          <a:noFill/>
+        </p:spPr>
+        <p:txBody>
+          <a:bodyPr wrap="square" lIns="45720" rIns="45720" tIns="27432" bIns="27432" anchor="t">
+            <a:spAutoFit/>
+          </a:bodyPr>
+          <a:lstStyle/>
+          <a:p>
+            <a:pPr algn="r"/>
+            <a:r>
+              <a:rPr sz="1100" b="0" i="0">
+                <a:solidFill>
+                  <a:srgbClr val="243447"/>
+                </a:solidFill>
+                <a:latin typeface="Aptos"/>
+              </a:rPr>
+              <a:t>2.61</a:t>
+            </a:r>
+          </a:p>
+        </p:txBody>
+      </p:sp>
+      <p:sp>
+        <p:nvSpPr>
+          <p:cNvPr id="42" name="TextBox 41"/>
+          <p:cNvSpPr txBox="1"/>
+          <p:nvPr/>
+        </p:nvSpPr>
+        <p:spPr>
+          <a:xfrm>
+            <a:off x="6537959" y="3803904"/>
+            <a:ext cx="914400" cy="274320"/>
+          </a:xfrm>
+          <a:prstGeom prst="rect">
+            <a:avLst/>
+          </a:prstGeom>
+          <a:noFill/>
+        </p:spPr>
+        <p:txBody>
+          <a:bodyPr wrap="square" lIns="45720" rIns="45720" tIns="27432" bIns="27432" anchor="t">
+            <a:spAutoFit/>
+          </a:bodyPr>
+          <a:lstStyle/>
+          <a:p>
+            <a:pPr algn="r"/>
+            <a:r>
+              <a:rPr sz="1100" b="0" i="0">
+                <a:solidFill>
+                  <a:srgbClr val="243447"/>
+                </a:solidFill>
+                <a:latin typeface="Aptos"/>
+              </a:rPr>
+              <a:t>+24.2%</a:t>
+            </a:r>
+          </a:p>
+        </p:txBody>
+      </p:sp>
+      <p:sp>
+        <p:nvSpPr>
+          <p:cNvPr id="43" name="TextBox 42"/>
+          <p:cNvSpPr txBox="1"/>
+          <p:nvPr/>
+        </p:nvSpPr>
+        <p:spPr>
+          <a:xfrm>
+            <a:off x="7452359" y="3803904"/>
+            <a:ext cx="914400" cy="274320"/>
+          </a:xfrm>
+          <a:prstGeom prst="rect">
+            <a:avLst/>
+          </a:prstGeom>
+          <a:noFill/>
+        </p:spPr>
+        <p:txBody>
+          <a:bodyPr wrap="square" lIns="45720" rIns="45720" tIns="27432" bIns="27432" anchor="t">
+            <a:spAutoFit/>
+          </a:bodyPr>
+          <a:lstStyle/>
+          <a:p>
+            <a:pPr algn="r"/>
+            <a:r>
+              <a:rPr sz="1100" b="0" i="0">
+                <a:solidFill>
+                  <a:srgbClr val="243447"/>
+                </a:solidFill>
+                <a:latin typeface="Aptos"/>
+              </a:rPr>
+              <a:t>+10.8%</a:t>
+            </a:r>
+          </a:p>
+        </p:txBody>
+      </p:sp>
+      <p:sp>
+        <p:nvSpPr>
+          <p:cNvPr id="44" name="TextBox 43"/>
+          <p:cNvSpPr txBox="1"/>
+          <p:nvPr/>
+        </p:nvSpPr>
+        <p:spPr>
+          <a:xfrm>
+            <a:off x="8366759" y="3803904"/>
+            <a:ext cx="914400" cy="274320"/>
+          </a:xfrm>
+          <a:prstGeom prst="rect">
+            <a:avLst/>
+          </a:prstGeom>
+          <a:noFill/>
+        </p:spPr>
+        <p:txBody>
+          <a:bodyPr wrap="square" lIns="45720" rIns="45720" tIns="27432" bIns="27432" anchor="t">
+            <a:spAutoFit/>
+          </a:bodyPr>
+          <a:lstStyle/>
+          <a:p>
+            <a:pPr algn="r"/>
+            <a:r>
+              <a:rPr sz="1100" b="0" i="0">
+                <a:solidFill>
+                  <a:srgbClr val="243447"/>
+                </a:solidFill>
+                <a:latin typeface="Aptos"/>
+              </a:rPr>
+              <a:t>+13.5%</a:t>
+            </a:r>
+          </a:p>
+        </p:txBody>
+      </p:sp>
+      <p:sp>
+        <p:nvSpPr>
+          <p:cNvPr id="45" name="TextBox 44"/>
+          <p:cNvSpPr txBox="1"/>
+          <p:nvPr/>
+        </p:nvSpPr>
+        <p:spPr>
+          <a:xfrm>
+            <a:off x="9281159" y="3803904"/>
+            <a:ext cx="914400" cy="274320"/>
+          </a:xfrm>
+          <a:prstGeom prst="rect">
+            <a:avLst/>
+          </a:prstGeom>
+          <a:noFill/>
+        </p:spPr>
+        <p:txBody>
+          <a:bodyPr wrap="square" lIns="45720" rIns="45720" tIns="27432" bIns="27432" anchor="t">
+            <a:spAutoFit/>
+          </a:bodyPr>
+          <a:lstStyle/>
+          <a:p>
+            <a:pPr algn="r"/>
+            <a:r>
+              <a:rPr sz="1100" b="0" i="0">
+                <a:solidFill>
+                  <a:srgbClr val="243447"/>
+                </a:solidFill>
+                <a:latin typeface="Aptos"/>
+              </a:rPr>
+              <a:t>+18.0%</a:t>
+            </a:r>
+          </a:p>
+        </p:txBody>
+      </p:sp>
+      <p:sp>
+        <p:nvSpPr>
+          <p:cNvPr id="46" name="TextBox 45"/>
+          <p:cNvSpPr txBox="1"/>
+          <p:nvPr/>
+        </p:nvSpPr>
+        <p:spPr>
+          <a:xfrm>
+            <a:off x="10195559" y="3803904"/>
+            <a:ext cx="1463040" cy="274320"/>
+          </a:xfrm>
+          <a:prstGeom prst="rect">
+            <a:avLst/>
+          </a:prstGeom>
+          <a:noFill/>
+        </p:spPr>
+        <p:txBody>
+          <a:bodyPr wrap="square" lIns="45720" rIns="45720" tIns="27432" bIns="27432" anchor="t">
+            <a:spAutoFit/>
+          </a:bodyPr>
+          <a:lstStyle/>
+          <a:p>
+            <a:r>
+              <a:rPr sz="1100" b="0" i="0">
+                <a:solidFill>
+                  <a:srgbClr val="243447"/>
+                </a:solidFill>
+                <a:latin typeface="Aptos"/>
+              </a:rPr>
+              <a:t>3, 4</a:t>
+            </a:r>
+          </a:p>
+        </p:txBody>
+      </p:sp>
+      <p:sp>
+        <p:nvSpPr>
+          <p:cNvPr id="47" name="TextBox 46"/>
+          <p:cNvSpPr txBox="1"/>
+          <p:nvPr/>
+        </p:nvSpPr>
+        <p:spPr>
+          <a:xfrm>
+            <a:off x="502920" y="4096512"/>
+            <a:ext cx="1463040" cy="274320"/>
+          </a:xfrm>
+          <a:prstGeom prst="rect">
+            <a:avLst/>
+          </a:prstGeom>
+          <a:noFill/>
+        </p:spPr>
+        <p:txBody>
+          <a:bodyPr wrap="square" lIns="45720" rIns="45720" tIns="27432" bIns="27432" anchor="t">
+            <a:spAutoFit/>
+          </a:bodyPr>
+          <a:lstStyle/>
+          <a:p>
+            <a:r>
+              <a:rPr sz="1100" b="0" i="0">
+                <a:solidFill>
+                  <a:srgbClr val="243447"/>
+                </a:solidFill>
+                <a:latin typeface="Aptos"/>
+              </a:rPr>
+              <a:t>S3, 2025 Q3</a:t>
+            </a:r>
+          </a:p>
+        </p:txBody>
+      </p:sp>
+      <p:sp>
+        <p:nvSpPr>
+          <p:cNvPr id="48" name="TextBox 47"/>
+          <p:cNvSpPr txBox="1"/>
+          <p:nvPr/>
+        </p:nvSpPr>
+        <p:spPr>
+          <a:xfrm>
+            <a:off x="1965960" y="4096512"/>
+            <a:ext cx="2377440" cy="274320"/>
+          </a:xfrm>
+          <a:prstGeom prst="rect">
+            <a:avLst/>
+          </a:prstGeom>
+          <a:noFill/>
+        </p:spPr>
+        <p:txBody>
+          <a:bodyPr wrap="square" lIns="45720" rIns="45720" tIns="27432" bIns="27432" anchor="t">
+            <a:spAutoFit/>
+          </a:bodyPr>
+          <a:lstStyle/>
+          <a:p>
+            <a:r>
+              <a:rPr sz="1100" b="0" i="0">
+                <a:solidFill>
+                  <a:srgbClr val="243447"/>
+                </a:solidFill>
+                <a:latin typeface="Aptos"/>
+              </a:rPr>
+              <a:t>equal_weight</a:t>
+            </a:r>
+          </a:p>
+        </p:txBody>
+      </p:sp>
+      <p:sp>
+        <p:nvSpPr>
+          <p:cNvPr id="49" name="TextBox 48"/>
+          <p:cNvSpPr txBox="1"/>
+          <p:nvPr/>
+        </p:nvSpPr>
+        <p:spPr>
+          <a:xfrm>
+            <a:off x="4343400" y="4096512"/>
+            <a:ext cx="1005840" cy="274320"/>
+          </a:xfrm>
+          <a:prstGeom prst="rect">
+            <a:avLst/>
+          </a:prstGeom>
+          <a:noFill/>
+        </p:spPr>
+        <p:txBody>
+          <a:bodyPr wrap="square" lIns="45720" rIns="45720" tIns="27432" bIns="27432" anchor="t">
+            <a:spAutoFit/>
+          </a:bodyPr>
+          <a:lstStyle/>
+          <a:p>
+            <a:pPr algn="r"/>
+            <a:r>
+              <a:rPr sz="1100" b="0" i="0">
+                <a:solidFill>
+                  <a:srgbClr val="243447"/>
+                </a:solidFill>
+                <a:latin typeface="Aptos"/>
+              </a:rPr>
+              <a:t>1.07</a:t>
+            </a:r>
+          </a:p>
+        </p:txBody>
+      </p:sp>
+      <p:sp>
+        <p:nvSpPr>
+          <p:cNvPr id="50" name="TextBox 49"/>
+          <p:cNvSpPr txBox="1"/>
+          <p:nvPr/>
+        </p:nvSpPr>
+        <p:spPr>
+          <a:xfrm>
+            <a:off x="5349240" y="4096512"/>
+            <a:ext cx="1188720" cy="274320"/>
+          </a:xfrm>
+          <a:prstGeom prst="rect">
+            <a:avLst/>
+          </a:prstGeom>
+          <a:noFill/>
+        </p:spPr>
+        <p:txBody>
+          <a:bodyPr wrap="square" lIns="45720" rIns="45720" tIns="27432" bIns="27432" anchor="t">
+            <a:spAutoFit/>
+          </a:bodyPr>
+          <a:lstStyle/>
+          <a:p>
+            <a:pPr algn="r"/>
+            <a:r>
+              <a:rPr sz="1100" b="0" i="0">
+                <a:solidFill>
+                  <a:srgbClr val="243447"/>
+                </a:solidFill>
+                <a:latin typeface="Aptos"/>
+              </a:rPr>
+              <a:t>3.17</a:t>
+            </a:r>
+          </a:p>
+        </p:txBody>
+      </p:sp>
+      <p:sp>
+        <p:nvSpPr>
+          <p:cNvPr id="51" name="TextBox 50"/>
+          <p:cNvSpPr txBox="1"/>
+          <p:nvPr/>
+        </p:nvSpPr>
+        <p:spPr>
+          <a:xfrm>
+            <a:off x="6537959" y="4096512"/>
+            <a:ext cx="914400" cy="274320"/>
+          </a:xfrm>
+          <a:prstGeom prst="rect">
+            <a:avLst/>
+          </a:prstGeom>
+          <a:noFill/>
+        </p:spPr>
+        <p:txBody>
+          <a:bodyPr wrap="square" lIns="45720" rIns="45720" tIns="27432" bIns="27432" anchor="t">
+            <a:spAutoFit/>
+          </a:bodyPr>
+          <a:lstStyle/>
+          <a:p>
+            <a:pPr algn="r"/>
+            <a:r>
+              <a:rPr sz="1100" b="0" i="0">
+                <a:solidFill>
+                  <a:srgbClr val="243447"/>
+                </a:solidFill>
+                <a:latin typeface="Aptos"/>
+              </a:rPr>
+              <a:t>+14.3%</a:t>
+            </a:r>
+          </a:p>
+        </p:txBody>
+      </p:sp>
+      <p:sp>
+        <p:nvSpPr>
+          <p:cNvPr id="52" name="TextBox 51"/>
+          <p:cNvSpPr txBox="1"/>
+          <p:nvPr/>
+        </p:nvSpPr>
+        <p:spPr>
+          <a:xfrm>
+            <a:off x="7452359" y="4096512"/>
+            <a:ext cx="914400" cy="274320"/>
+          </a:xfrm>
+          <a:prstGeom prst="rect">
+            <a:avLst/>
+          </a:prstGeom>
+          <a:noFill/>
+        </p:spPr>
+        <p:txBody>
+          <a:bodyPr wrap="square" lIns="45720" rIns="45720" tIns="27432" bIns="27432" anchor="t">
+            <a:spAutoFit/>
+          </a:bodyPr>
+          <a:lstStyle/>
+          <a:p>
+            <a:pPr algn="r"/>
+            <a:r>
+              <a:rPr sz="1100" b="0" i="0">
+                <a:solidFill>
+                  <a:srgbClr val="243447"/>
+                </a:solidFill>
+                <a:latin typeface="Aptos"/>
+              </a:rPr>
+              <a:t>+8.1%</a:t>
+            </a:r>
+          </a:p>
+        </p:txBody>
+      </p:sp>
+      <p:sp>
+        <p:nvSpPr>
+          <p:cNvPr id="53" name="TextBox 52"/>
+          <p:cNvSpPr txBox="1"/>
+          <p:nvPr/>
+        </p:nvSpPr>
+        <p:spPr>
+          <a:xfrm>
+            <a:off x="8366759" y="4096512"/>
+            <a:ext cx="914400" cy="274320"/>
+          </a:xfrm>
+          <a:prstGeom prst="rect">
+            <a:avLst/>
+          </a:prstGeom>
+          <a:noFill/>
+        </p:spPr>
+        <p:txBody>
+          <a:bodyPr wrap="square" lIns="45720" rIns="45720" tIns="27432" bIns="27432" anchor="t">
+            <a:spAutoFit/>
+          </a:bodyPr>
+          <a:lstStyle/>
+          <a:p>
+            <a:pPr algn="r"/>
+            <a:r>
+              <a:rPr sz="1100" b="0" i="0">
+                <a:solidFill>
+                  <a:srgbClr val="243447"/>
+                </a:solidFill>
+                <a:latin typeface="Aptos"/>
+              </a:rPr>
+              <a:t>+6.2%</a:t>
+            </a:r>
+          </a:p>
+        </p:txBody>
+      </p:sp>
+      <p:sp>
+        <p:nvSpPr>
+          <p:cNvPr id="54" name="TextBox 53"/>
+          <p:cNvSpPr txBox="1"/>
+          <p:nvPr/>
+        </p:nvSpPr>
+        <p:spPr>
+          <a:xfrm>
+            <a:off x="9281159" y="4096512"/>
+            <a:ext cx="914400" cy="274320"/>
+          </a:xfrm>
+          <a:prstGeom prst="rect">
+            <a:avLst/>
+          </a:prstGeom>
+          <a:noFill/>
+        </p:spPr>
+        <p:txBody>
+          <a:bodyPr wrap="square" lIns="45720" rIns="45720" tIns="27432" bIns="27432" anchor="t">
+            <a:spAutoFit/>
+          </a:bodyPr>
+          <a:lstStyle/>
+          <a:p>
+            <a:pPr algn="r"/>
+            <a:r>
+              <a:rPr sz="1100" b="0" i="0">
+                <a:solidFill>
+                  <a:srgbClr val="243447"/>
+                </a:solidFill>
+                <a:latin typeface="Aptos"/>
+              </a:rPr>
+              <a:t>+14.6%</a:t>
+            </a:r>
+          </a:p>
+        </p:txBody>
+      </p:sp>
+      <p:sp>
+        <p:nvSpPr>
+          <p:cNvPr id="55" name="TextBox 54"/>
+          <p:cNvSpPr txBox="1"/>
+          <p:nvPr/>
+        </p:nvSpPr>
+        <p:spPr>
+          <a:xfrm>
+            <a:off x="10195559" y="4096512"/>
+            <a:ext cx="1463040" cy="274320"/>
+          </a:xfrm>
+          <a:prstGeom prst="rect">
+            <a:avLst/>
+          </a:prstGeom>
+          <a:noFill/>
+        </p:spPr>
+        <p:txBody>
+          <a:bodyPr wrap="square" lIns="45720" rIns="45720" tIns="27432" bIns="27432" anchor="t">
+            <a:spAutoFit/>
+          </a:bodyPr>
+          <a:lstStyle/>
+          <a:p>
+            <a:r>
+              <a:rPr sz="1100" b="0" i="0">
+                <a:solidFill>
+                  <a:srgbClr val="243447"/>
+                </a:solidFill>
+                <a:latin typeface="Aptos"/>
+              </a:rPr>
+              <a:t>5, 6, 7</a:t>
+            </a:r>
+          </a:p>
+        </p:txBody>
+      </p:sp>
+      <p:sp>
+        <p:nvSpPr>
+          <p:cNvPr id="56" name="TextBox 55"/>
+          <p:cNvSpPr txBox="1"/>
+          <p:nvPr/>
+        </p:nvSpPr>
+        <p:spPr>
+          <a:xfrm>
+            <a:off x="502920" y="4389120"/>
+            <a:ext cx="1463040" cy="274320"/>
+          </a:xfrm>
+          <a:prstGeom prst="rect">
+            <a:avLst/>
+          </a:prstGeom>
+          <a:noFill/>
+        </p:spPr>
+        <p:txBody>
+          <a:bodyPr wrap="square" lIns="45720" rIns="45720" tIns="27432" bIns="27432" anchor="t">
+            <a:spAutoFit/>
+          </a:bodyPr>
+          <a:lstStyle/>
+          <a:p>
+            <a:r>
+              <a:rPr sz="1100" b="0" i="0">
+                <a:solidFill>
+                  <a:srgbClr val="243447"/>
+                </a:solidFill>
+                <a:latin typeface="Aptos"/>
+              </a:rPr>
+              <a:t>S4, 2025 Q4</a:t>
+            </a:r>
+          </a:p>
+        </p:txBody>
+      </p:sp>
+      <p:sp>
+        <p:nvSpPr>
+          <p:cNvPr id="57" name="TextBox 56"/>
+          <p:cNvSpPr txBox="1"/>
+          <p:nvPr/>
+        </p:nvSpPr>
+        <p:spPr>
+          <a:xfrm>
+            <a:off x="1965960" y="4389120"/>
+            <a:ext cx="2377440" cy="274320"/>
+          </a:xfrm>
+          <a:prstGeom prst="rect">
+            <a:avLst/>
+          </a:prstGeom>
+          <a:noFill/>
+        </p:spPr>
+        <p:txBody>
+          <a:bodyPr wrap="square" lIns="45720" rIns="45720" tIns="27432" bIns="27432" anchor="t">
+            <a:spAutoFit/>
+          </a:bodyPr>
+          <a:lstStyle/>
+          <a:p>
+            <a:r>
+              <a:rPr sz="1100" b="0" i="0">
+                <a:solidFill>
+                  <a:srgbClr val="243447"/>
+                </a:solidFill>
+                <a:latin typeface="Aptos"/>
+              </a:rPr>
+              <a:t>equal_weight</a:t>
+            </a:r>
+          </a:p>
+        </p:txBody>
+      </p:sp>
+      <p:sp>
+        <p:nvSpPr>
+          <p:cNvPr id="58" name="TextBox 57"/>
+          <p:cNvSpPr txBox="1"/>
+          <p:nvPr/>
+        </p:nvSpPr>
+        <p:spPr>
+          <a:xfrm>
+            <a:off x="4343400" y="4389120"/>
+            <a:ext cx="1005840" cy="274320"/>
+          </a:xfrm>
+          <a:prstGeom prst="rect">
+            <a:avLst/>
+          </a:prstGeom>
+          <a:noFill/>
+        </p:spPr>
+        <p:txBody>
+          <a:bodyPr wrap="square" lIns="45720" rIns="45720" tIns="27432" bIns="27432" anchor="t">
+            <a:spAutoFit/>
+          </a:bodyPr>
+          <a:lstStyle/>
+          <a:p>
+            <a:pPr algn="r"/>
+            <a:r>
+              <a:rPr sz="1100" b="0" i="0">
+                <a:solidFill>
+                  <a:srgbClr val="243447"/>
+                </a:solidFill>
+                <a:latin typeface="Aptos"/>
+              </a:rPr>
+              <a:t>1.32</a:t>
+            </a:r>
+          </a:p>
+        </p:txBody>
+      </p:sp>
+      <p:sp>
+        <p:nvSpPr>
+          <p:cNvPr id="59" name="TextBox 58"/>
+          <p:cNvSpPr txBox="1"/>
+          <p:nvPr/>
+        </p:nvSpPr>
+        <p:spPr>
+          <a:xfrm>
+            <a:off x="5349240" y="4389120"/>
+            <a:ext cx="1188720" cy="274320"/>
+          </a:xfrm>
+          <a:prstGeom prst="rect">
+            <a:avLst/>
+          </a:prstGeom>
+          <a:noFill/>
+        </p:spPr>
+        <p:txBody>
+          <a:bodyPr wrap="square" lIns="45720" rIns="45720" tIns="27432" bIns="27432" anchor="t">
+            <a:spAutoFit/>
+          </a:bodyPr>
+          <a:lstStyle/>
+          <a:p>
+            <a:pPr algn="r"/>
+            <a:r>
+              <a:rPr sz="1100" b="0" i="0">
+                <a:solidFill>
+                  <a:srgbClr val="243447"/>
+                </a:solidFill>
+                <a:latin typeface="Aptos"/>
+              </a:rPr>
+              <a:t>0.42</a:t>
+            </a:r>
+          </a:p>
+        </p:txBody>
+      </p:sp>
+      <p:sp>
+        <p:nvSpPr>
+          <p:cNvPr id="60" name="TextBox 59"/>
+          <p:cNvSpPr txBox="1"/>
+          <p:nvPr/>
+        </p:nvSpPr>
+        <p:spPr>
+          <a:xfrm>
+            <a:off x="6537959" y="4389120"/>
+            <a:ext cx="914400" cy="274320"/>
+          </a:xfrm>
+          <a:prstGeom prst="rect">
+            <a:avLst/>
+          </a:prstGeom>
+          <a:noFill/>
+        </p:spPr>
+        <p:txBody>
+          <a:bodyPr wrap="square" lIns="45720" rIns="45720" tIns="27432" bIns="27432" anchor="t">
+            <a:spAutoFit/>
+          </a:bodyPr>
+          <a:lstStyle/>
+          <a:p>
+            <a:pPr algn="r"/>
+            <a:r>
+              <a:rPr sz="1100" b="0" i="0">
+                <a:solidFill>
+                  <a:srgbClr val="243447"/>
+                </a:solidFill>
+                <a:latin typeface="Aptos"/>
+              </a:rPr>
+              <a:t>+1.5%</a:t>
+            </a:r>
+          </a:p>
+        </p:txBody>
+      </p:sp>
+      <p:sp>
+        <p:nvSpPr>
+          <p:cNvPr id="61" name="TextBox 60"/>
+          <p:cNvSpPr txBox="1"/>
+          <p:nvPr/>
+        </p:nvSpPr>
+        <p:spPr>
+          <a:xfrm>
+            <a:off x="7452359" y="4389120"/>
+            <a:ext cx="914400" cy="274320"/>
+          </a:xfrm>
+          <a:prstGeom prst="rect">
+            <a:avLst/>
+          </a:prstGeom>
+          <a:noFill/>
+        </p:spPr>
+        <p:txBody>
+          <a:bodyPr wrap="square" lIns="45720" rIns="45720" tIns="27432" bIns="27432" anchor="t">
+            <a:spAutoFit/>
+          </a:bodyPr>
+          <a:lstStyle/>
+          <a:p>
+            <a:pPr algn="r"/>
+            <a:r>
+              <a:rPr sz="1100" b="0" i="0">
+                <a:solidFill>
+                  <a:srgbClr val="243447"/>
+                </a:solidFill>
+                <a:latin typeface="Aptos"/>
+              </a:rPr>
+              <a:t>+2.7%</a:t>
+            </a:r>
+          </a:p>
+        </p:txBody>
+      </p:sp>
+      <p:sp>
+        <p:nvSpPr>
+          <p:cNvPr id="62" name="TextBox 61"/>
+          <p:cNvSpPr txBox="1"/>
+          <p:nvPr/>
+        </p:nvSpPr>
+        <p:spPr>
+          <a:xfrm>
+            <a:off x="8366759" y="4389120"/>
+            <a:ext cx="914400" cy="274320"/>
+          </a:xfrm>
+          <a:prstGeom prst="rect">
+            <a:avLst/>
+          </a:prstGeom>
+          <a:noFill/>
+        </p:spPr>
+        <p:txBody>
+          <a:bodyPr wrap="square" lIns="45720" rIns="45720" tIns="27432" bIns="27432" anchor="t">
+            <a:spAutoFit/>
+          </a:bodyPr>
+          <a:lstStyle/>
+          <a:p>
+            <a:pPr algn="r"/>
+            <a:r>
+              <a:rPr sz="1100" b="0" i="0">
+                <a:solidFill>
+                  <a:srgbClr val="243447"/>
+                </a:solidFill>
+                <a:latin typeface="Aptos"/>
+              </a:rPr>
+              <a:t>−1.2%</a:t>
+            </a:r>
+          </a:p>
+        </p:txBody>
+      </p:sp>
+      <p:sp>
+        <p:nvSpPr>
+          <p:cNvPr id="63" name="TextBox 62"/>
+          <p:cNvSpPr txBox="1"/>
+          <p:nvPr/>
+        </p:nvSpPr>
+        <p:spPr>
+          <a:xfrm>
+            <a:off x="9281159" y="4389120"/>
+            <a:ext cx="914400" cy="274320"/>
+          </a:xfrm>
+          <a:prstGeom prst="rect">
+            <a:avLst/>
+          </a:prstGeom>
+          <a:noFill/>
+        </p:spPr>
+        <p:txBody>
+          <a:bodyPr wrap="square" lIns="45720" rIns="45720" tIns="27432" bIns="27432" anchor="t">
+            <a:spAutoFit/>
+          </a:bodyPr>
+          <a:lstStyle/>
+          <a:p>
+            <a:pPr algn="r"/>
+            <a:r>
+              <a:rPr sz="1100" b="0" i="0">
+                <a:solidFill>
+                  <a:srgbClr val="243447"/>
+                </a:solidFill>
+                <a:latin typeface="Aptos"/>
+              </a:rPr>
+              <a:t>+1.2%</a:t>
+            </a:r>
+          </a:p>
+        </p:txBody>
+      </p:sp>
+      <p:sp>
+        <p:nvSpPr>
+          <p:cNvPr id="64" name="TextBox 63"/>
+          <p:cNvSpPr txBox="1"/>
+          <p:nvPr/>
+        </p:nvSpPr>
+        <p:spPr>
+          <a:xfrm>
+            <a:off x="10195559" y="4389120"/>
+            <a:ext cx="1463040" cy="274320"/>
+          </a:xfrm>
+          <a:prstGeom prst="rect">
+            <a:avLst/>
+          </a:prstGeom>
+          <a:noFill/>
+        </p:spPr>
+        <p:txBody>
+          <a:bodyPr wrap="square" lIns="45720" rIns="45720" tIns="27432" bIns="27432" anchor="t">
+            <a:spAutoFit/>
+          </a:bodyPr>
+          <a:lstStyle/>
+          <a:p>
+            <a:r>
+              <a:rPr sz="1100" b="0" i="0">
+                <a:solidFill>
+                  <a:srgbClr val="243447"/>
+                </a:solidFill>
+                <a:latin typeface="Aptos"/>
+              </a:rPr>
+              <a:t>8, 9, 10</a:t>
+            </a:r>
+          </a:p>
+        </p:txBody>
+      </p:sp>
+      <p:sp>
+        <p:nvSpPr>
+          <p:cNvPr id="65" name="TextBox 64"/>
+          <p:cNvSpPr txBox="1"/>
+          <p:nvPr/>
+        </p:nvSpPr>
+        <p:spPr>
+          <a:xfrm>
+            <a:off x="502920" y="4681728"/>
+            <a:ext cx="1463040" cy="274320"/>
+          </a:xfrm>
+          <a:prstGeom prst="rect">
+            <a:avLst/>
+          </a:prstGeom>
+          <a:noFill/>
+        </p:spPr>
+        <p:txBody>
+          <a:bodyPr wrap="square" lIns="45720" rIns="45720" tIns="27432" bIns="27432" anchor="t">
+            <a:spAutoFit/>
+          </a:bodyPr>
+          <a:lstStyle/>
+          <a:p>
+            <a:r>
+              <a:rPr sz="1100" b="0" i="0">
+                <a:solidFill>
+                  <a:srgbClr val="243447"/>
+                </a:solidFill>
+                <a:latin typeface="Aptos"/>
+              </a:rPr>
+              <a:t>S5, 2026 Q1</a:t>
+            </a:r>
+          </a:p>
+        </p:txBody>
+      </p:sp>
+      <p:sp>
+        <p:nvSpPr>
+          <p:cNvPr id="66" name="TextBox 65"/>
+          <p:cNvSpPr txBox="1"/>
+          <p:nvPr/>
+        </p:nvSpPr>
+        <p:spPr>
+          <a:xfrm>
+            <a:off x="1965960" y="4681728"/>
+            <a:ext cx="2377440" cy="274320"/>
+          </a:xfrm>
+          <a:prstGeom prst="rect">
+            <a:avLst/>
+          </a:prstGeom>
+          <a:noFill/>
+        </p:spPr>
+        <p:txBody>
+          <a:bodyPr wrap="square" lIns="45720" rIns="45720" tIns="27432" bIns="27432" anchor="t">
+            <a:spAutoFit/>
+          </a:bodyPr>
+          <a:lstStyle/>
+          <a:p>
+            <a:r>
+              <a:rPr sz="1100" b="0" i="0">
+                <a:solidFill>
+                  <a:srgbClr val="243447"/>
+                </a:solidFill>
+                <a:latin typeface="Aptos"/>
+              </a:rPr>
+              <a:t>equal_weight</a:t>
+            </a:r>
+          </a:p>
+        </p:txBody>
+      </p:sp>
+      <p:sp>
+        <p:nvSpPr>
+          <p:cNvPr id="67" name="TextBox 66"/>
+          <p:cNvSpPr txBox="1"/>
+          <p:nvPr/>
+        </p:nvSpPr>
+        <p:spPr>
+          <a:xfrm>
+            <a:off x="4343400" y="4681728"/>
+            <a:ext cx="1005840" cy="274320"/>
+          </a:xfrm>
+          <a:prstGeom prst="rect">
+            <a:avLst/>
+          </a:prstGeom>
+          <a:noFill/>
+        </p:spPr>
+        <p:txBody>
+          <a:bodyPr wrap="square" lIns="45720" rIns="45720" tIns="27432" bIns="27432" anchor="t">
+            <a:spAutoFit/>
+          </a:bodyPr>
+          <a:lstStyle/>
+          <a:p>
+            <a:pPr algn="r"/>
+            <a:r>
+              <a:rPr sz="1100" b="0" i="0">
+                <a:solidFill>
+                  <a:srgbClr val="243447"/>
+                </a:solidFill>
+                <a:latin typeface="Aptos"/>
+              </a:rPr>
+              <a:t>0.97</a:t>
+            </a:r>
+          </a:p>
+        </p:txBody>
+      </p:sp>
+      <p:sp>
+        <p:nvSpPr>
+          <p:cNvPr id="68" name="TextBox 67"/>
+          <p:cNvSpPr txBox="1"/>
+          <p:nvPr/>
+        </p:nvSpPr>
+        <p:spPr>
+          <a:xfrm>
+            <a:off x="5349240" y="4681728"/>
+            <a:ext cx="1188720" cy="274320"/>
+          </a:xfrm>
+          <a:prstGeom prst="rect">
+            <a:avLst/>
+          </a:prstGeom>
+          <a:noFill/>
+        </p:spPr>
+        <p:txBody>
+          <a:bodyPr wrap="square" lIns="45720" rIns="45720" tIns="27432" bIns="27432" anchor="t">
+            <a:spAutoFit/>
+          </a:bodyPr>
+          <a:lstStyle/>
+          <a:p>
+            <a:pPr algn="r"/>
+            <a:r>
+              <a:rPr sz="1100" b="0" i="0">
+                <a:solidFill>
+                  <a:srgbClr val="243447"/>
+                </a:solidFill>
+                <a:latin typeface="Aptos"/>
+              </a:rPr>
+              <a:t>-2.14</a:t>
+            </a:r>
+          </a:p>
+        </p:txBody>
+      </p:sp>
+      <p:sp>
+        <p:nvSpPr>
+          <p:cNvPr id="69" name="TextBox 68"/>
+          <p:cNvSpPr txBox="1"/>
+          <p:nvPr/>
+        </p:nvSpPr>
+        <p:spPr>
+          <a:xfrm>
+            <a:off x="6537959" y="4681728"/>
+            <a:ext cx="914400" cy="274320"/>
+          </a:xfrm>
+          <a:prstGeom prst="rect">
+            <a:avLst/>
+          </a:prstGeom>
+          <a:noFill/>
+        </p:spPr>
+        <p:txBody>
+          <a:bodyPr wrap="square" lIns="45720" rIns="45720" tIns="27432" bIns="27432" anchor="t">
+            <a:spAutoFit/>
+          </a:bodyPr>
+          <a:lstStyle/>
+          <a:p>
+            <a:pPr algn="r"/>
+            <a:r>
+              <a:rPr sz="1100" b="0" i="0">
+                <a:solidFill>
+                  <a:srgbClr val="243447"/>
+                </a:solidFill>
+                <a:latin typeface="Aptos"/>
+              </a:rPr>
+              <a:t>−8.7%</a:t>
+            </a:r>
+          </a:p>
+        </p:txBody>
+      </p:sp>
+      <p:sp>
+        <p:nvSpPr>
+          <p:cNvPr id="70" name="TextBox 69"/>
+          <p:cNvSpPr txBox="1"/>
+          <p:nvPr/>
+        </p:nvSpPr>
+        <p:spPr>
+          <a:xfrm>
+            <a:off x="7452359" y="4681728"/>
+            <a:ext cx="914400" cy="274320"/>
+          </a:xfrm>
+          <a:prstGeom prst="rect">
+            <a:avLst/>
+          </a:prstGeom>
+          <a:noFill/>
+        </p:spPr>
+        <p:txBody>
+          <a:bodyPr wrap="square" lIns="45720" rIns="45720" tIns="27432" bIns="27432" anchor="t">
+            <a:spAutoFit/>
+          </a:bodyPr>
+          <a:lstStyle/>
+          <a:p>
+            <a:pPr algn="r"/>
+            <a:r>
+              <a:rPr sz="1100" b="0" i="0">
+                <a:solidFill>
+                  <a:srgbClr val="243447"/>
+                </a:solidFill>
+                <a:latin typeface="Aptos"/>
+              </a:rPr>
+              <a:t>−4.4%</a:t>
+            </a:r>
+          </a:p>
+        </p:txBody>
+      </p:sp>
+      <p:sp>
+        <p:nvSpPr>
+          <p:cNvPr id="71" name="TextBox 70"/>
+          <p:cNvSpPr txBox="1"/>
+          <p:nvPr/>
+        </p:nvSpPr>
+        <p:spPr>
+          <a:xfrm>
+            <a:off x="8366759" y="4681728"/>
+            <a:ext cx="914400" cy="274320"/>
+          </a:xfrm>
+          <a:prstGeom prst="rect">
+            <a:avLst/>
+          </a:prstGeom>
+          <a:noFill/>
+        </p:spPr>
+        <p:txBody>
+          <a:bodyPr wrap="square" lIns="45720" rIns="45720" tIns="27432" bIns="27432" anchor="t">
+            <a:spAutoFit/>
+          </a:bodyPr>
+          <a:lstStyle/>
+          <a:p>
+            <a:pPr algn="r"/>
+            <a:r>
+              <a:rPr sz="1100" b="0" i="0">
+                <a:solidFill>
+                  <a:srgbClr val="243447"/>
+                </a:solidFill>
+                <a:latin typeface="Aptos"/>
+              </a:rPr>
+              <a:t>−4.3%</a:t>
+            </a:r>
+          </a:p>
+        </p:txBody>
+      </p:sp>
+      <p:sp>
+        <p:nvSpPr>
+          <p:cNvPr id="72" name="TextBox 71"/>
+          <p:cNvSpPr txBox="1"/>
+          <p:nvPr/>
+        </p:nvSpPr>
+        <p:spPr>
+          <a:xfrm>
+            <a:off x="9281159" y="4681728"/>
+            <a:ext cx="914400" cy="274320"/>
+          </a:xfrm>
+          <a:prstGeom prst="rect">
+            <a:avLst/>
+          </a:prstGeom>
+          <a:noFill/>
+        </p:spPr>
+        <p:txBody>
+          <a:bodyPr wrap="square" lIns="45720" rIns="45720" tIns="27432" bIns="27432" anchor="t">
+            <a:spAutoFit/>
+          </a:bodyPr>
+          <a:lstStyle/>
+          <a:p>
+            <a:pPr algn="r"/>
+            <a:r>
+              <a:rPr sz="1100" b="0" i="0">
+                <a:solidFill>
+                  <a:srgbClr val="243447"/>
+                </a:solidFill>
+                <a:latin typeface="Aptos"/>
+              </a:rPr>
+              <a:t>−5.4%</a:t>
+            </a:r>
+          </a:p>
+        </p:txBody>
+      </p:sp>
+      <p:sp>
+        <p:nvSpPr>
+          <p:cNvPr id="73" name="TextBox 72"/>
+          <p:cNvSpPr txBox="1"/>
+          <p:nvPr/>
+        </p:nvSpPr>
+        <p:spPr>
+          <a:xfrm>
+            <a:off x="10195559" y="4681728"/>
+            <a:ext cx="1463040" cy="274320"/>
+          </a:xfrm>
+          <a:prstGeom prst="rect">
+            <a:avLst/>
+          </a:prstGeom>
+          <a:noFill/>
+        </p:spPr>
+        <p:txBody>
+          <a:bodyPr wrap="square" lIns="45720" rIns="45720" tIns="27432" bIns="27432" anchor="t">
+            <a:spAutoFit/>
+          </a:bodyPr>
+          <a:lstStyle/>
+          <a:p>
+            <a:r>
+              <a:rPr sz="1100" b="0" i="0">
+                <a:solidFill>
+                  <a:srgbClr val="243447"/>
+                </a:solidFill>
+                <a:latin typeface="Aptos"/>
+              </a:rPr>
+              <a:t>11, 12, 13</a:t>
+            </a:r>
+          </a:p>
+        </p:txBody>
+      </p:sp>
+      <p:sp>
+        <p:nvSpPr>
+          <p:cNvPr id="74" name="TextBox 73"/>
+          <p:cNvSpPr txBox="1"/>
+          <p:nvPr/>
+        </p:nvSpPr>
+        <p:spPr>
+          <a:xfrm>
+            <a:off x="502920" y="4974336"/>
+            <a:ext cx="1463040" cy="274320"/>
+          </a:xfrm>
+          <a:prstGeom prst="rect">
+            <a:avLst/>
+          </a:prstGeom>
+          <a:noFill/>
+        </p:spPr>
+        <p:txBody>
+          <a:bodyPr wrap="square" lIns="45720" rIns="45720" tIns="27432" bIns="27432" anchor="t">
+            <a:spAutoFit/>
+          </a:bodyPr>
+          <a:lstStyle/>
+          <a:p>
+            <a:r>
+              <a:rPr sz="1100" b="0" i="0">
+                <a:solidFill>
+                  <a:srgbClr val="243447"/>
+                </a:solidFill>
+                <a:latin typeface="Aptos"/>
+              </a:rPr>
+              <a:t>S6, 2026 Q2</a:t>
+            </a:r>
+          </a:p>
+        </p:txBody>
+      </p:sp>
+      <p:sp>
+        <p:nvSpPr>
+          <p:cNvPr id="75" name="TextBox 74"/>
+          <p:cNvSpPr txBox="1"/>
+          <p:nvPr/>
+        </p:nvSpPr>
+        <p:spPr>
+          <a:xfrm>
+            <a:off x="1965960" y="4974336"/>
+            <a:ext cx="2377440" cy="274320"/>
+          </a:xfrm>
+          <a:prstGeom prst="rect">
+            <a:avLst/>
+          </a:prstGeom>
+          <a:noFill/>
+        </p:spPr>
+        <p:txBody>
+          <a:bodyPr wrap="square" lIns="45720" rIns="45720" tIns="27432" bIns="27432" anchor="t">
+            <a:spAutoFit/>
+          </a:bodyPr>
+          <a:lstStyle/>
+          <a:p>
+            <a:r>
+              <a:rPr sz="1100" b="0" i="0">
+                <a:solidFill>
+                  <a:srgbClr val="243447"/>
+                </a:solidFill>
+                <a:latin typeface="Aptos"/>
+              </a:rPr>
+              <a:t>equal_weight</a:t>
+            </a:r>
+          </a:p>
+        </p:txBody>
+      </p:sp>
+      <p:sp>
+        <p:nvSpPr>
+          <p:cNvPr id="76" name="TextBox 75"/>
+          <p:cNvSpPr txBox="1"/>
+          <p:nvPr/>
+        </p:nvSpPr>
+        <p:spPr>
+          <a:xfrm>
+            <a:off x="4343400" y="4974336"/>
+            <a:ext cx="1005840" cy="274320"/>
+          </a:xfrm>
+          <a:prstGeom prst="rect">
+            <a:avLst/>
+          </a:prstGeom>
+          <a:noFill/>
+        </p:spPr>
+        <p:txBody>
+          <a:bodyPr wrap="square" lIns="45720" rIns="45720" tIns="27432" bIns="27432" anchor="t">
+            <a:spAutoFit/>
+          </a:bodyPr>
+          <a:lstStyle/>
+          <a:p>
+            <a:pPr algn="r"/>
+            <a:r>
+              <a:rPr sz="1100" b="0" i="0">
+                <a:solidFill>
+                  <a:srgbClr val="243447"/>
+                </a:solidFill>
+                <a:latin typeface="Aptos"/>
+              </a:rPr>
+              <a:t>1.12</a:t>
+            </a:r>
+          </a:p>
+        </p:txBody>
+      </p:sp>
+      <p:sp>
+        <p:nvSpPr>
+          <p:cNvPr id="77" name="TextBox 76"/>
+          <p:cNvSpPr txBox="1"/>
+          <p:nvPr/>
+        </p:nvSpPr>
+        <p:spPr>
+          <a:xfrm>
+            <a:off x="5349240" y="4974336"/>
+            <a:ext cx="1188720" cy="274320"/>
+          </a:xfrm>
+          <a:prstGeom prst="rect">
+            <a:avLst/>
+          </a:prstGeom>
+          <a:noFill/>
+        </p:spPr>
+        <p:txBody>
+          <a:bodyPr wrap="square" lIns="45720" rIns="45720" tIns="27432" bIns="27432" anchor="t">
+            <a:spAutoFit/>
+          </a:bodyPr>
+          <a:lstStyle/>
+          <a:p>
+            <a:pPr algn="r"/>
+            <a:r>
+              <a:rPr sz="1100" b="0" i="0">
+                <a:solidFill>
+                  <a:srgbClr val="243447"/>
+                </a:solidFill>
+                <a:latin typeface="Aptos"/>
+              </a:rPr>
+              <a:t>2.56</a:t>
+            </a:r>
+          </a:p>
+        </p:txBody>
+      </p:sp>
+      <p:sp>
+        <p:nvSpPr>
+          <p:cNvPr id="78" name="TextBox 77"/>
+          <p:cNvSpPr txBox="1"/>
+          <p:nvPr/>
+        </p:nvSpPr>
+        <p:spPr>
+          <a:xfrm>
+            <a:off x="6537959" y="4974336"/>
+            <a:ext cx="914400" cy="274320"/>
+          </a:xfrm>
+          <a:prstGeom prst="rect">
+            <a:avLst/>
+          </a:prstGeom>
+          <a:noFill/>
+        </p:spPr>
+        <p:txBody>
+          <a:bodyPr wrap="square" lIns="45720" rIns="45720" tIns="27432" bIns="27432" anchor="t">
+            <a:spAutoFit/>
+          </a:bodyPr>
+          <a:lstStyle/>
+          <a:p>
+            <a:pPr algn="r"/>
+            <a:r>
+              <a:rPr sz="1100" b="0" i="0">
+                <a:solidFill>
+                  <a:srgbClr val="243447"/>
+                </a:solidFill>
+                <a:latin typeface="Aptos"/>
+              </a:rPr>
+              <a:t>+7.7%</a:t>
+            </a:r>
+          </a:p>
+        </p:txBody>
+      </p:sp>
+      <p:sp>
+        <p:nvSpPr>
+          <p:cNvPr id="79" name="TextBox 78"/>
+          <p:cNvSpPr txBox="1"/>
+          <p:nvPr/>
+        </p:nvSpPr>
+        <p:spPr>
+          <a:xfrm>
+            <a:off x="7452359" y="4974336"/>
+            <a:ext cx="914400" cy="274320"/>
+          </a:xfrm>
+          <a:prstGeom prst="rect">
+            <a:avLst/>
+          </a:prstGeom>
+          <a:noFill/>
+        </p:spPr>
+        <p:txBody>
+          <a:bodyPr wrap="square" lIns="45720" rIns="45720" tIns="27432" bIns="27432" anchor="t">
+            <a:spAutoFit/>
+          </a:bodyPr>
+          <a:lstStyle/>
+          <a:p>
+            <a:pPr algn="r"/>
+            <a:r>
+              <a:rPr sz="1100" b="0" i="0">
+                <a:solidFill>
+                  <a:srgbClr val="243447"/>
+                </a:solidFill>
+                <a:latin typeface="Aptos"/>
+              </a:rPr>
+              <a:t>+15.1%</a:t>
+            </a:r>
+          </a:p>
+        </p:txBody>
+      </p:sp>
+      <p:sp>
+        <p:nvSpPr>
+          <p:cNvPr id="80" name="TextBox 79"/>
+          <p:cNvSpPr txBox="1"/>
+          <p:nvPr/>
+        </p:nvSpPr>
+        <p:spPr>
+          <a:xfrm>
+            <a:off x="8366759" y="4974336"/>
+            <a:ext cx="914400" cy="274320"/>
+          </a:xfrm>
+          <a:prstGeom prst="rect">
+            <a:avLst/>
+          </a:prstGeom>
+          <a:noFill/>
+        </p:spPr>
+        <p:txBody>
+          <a:bodyPr wrap="square" lIns="45720" rIns="45720" tIns="27432" bIns="27432" anchor="t">
+            <a:spAutoFit/>
+          </a:bodyPr>
+          <a:lstStyle/>
+          <a:p>
+            <a:pPr algn="r"/>
+            <a:r>
+              <a:rPr sz="1100" b="0" i="0">
+                <a:solidFill>
+                  <a:srgbClr val="243447"/>
+                </a:solidFill>
+                <a:latin typeface="Aptos"/>
+              </a:rPr>
+              <a:t>−7.4%</a:t>
+            </a:r>
+          </a:p>
+        </p:txBody>
+      </p:sp>
+      <p:sp>
+        <p:nvSpPr>
+          <p:cNvPr id="81" name="TextBox 80"/>
+          <p:cNvSpPr txBox="1"/>
+          <p:nvPr/>
+        </p:nvSpPr>
+        <p:spPr>
+          <a:xfrm>
+            <a:off x="9281159" y="4974336"/>
+            <a:ext cx="914400" cy="274320"/>
+          </a:xfrm>
+          <a:prstGeom prst="rect">
+            <a:avLst/>
+          </a:prstGeom>
+          <a:noFill/>
+        </p:spPr>
+        <p:txBody>
+          <a:bodyPr wrap="square" lIns="45720" rIns="45720" tIns="27432" bIns="27432" anchor="t">
+            <a:spAutoFit/>
+          </a:bodyPr>
+          <a:lstStyle/>
+          <a:p>
+            <a:pPr algn="r"/>
+            <a:r>
+              <a:rPr sz="1100" b="0" i="0">
+                <a:solidFill>
+                  <a:srgbClr val="243447"/>
+                </a:solidFill>
+                <a:latin typeface="Aptos"/>
+              </a:rPr>
+              <a:t>−0.0%</a:t>
+            </a:r>
+          </a:p>
+        </p:txBody>
+      </p:sp>
+      <p:sp>
+        <p:nvSpPr>
+          <p:cNvPr id="82" name="TextBox 81"/>
+          <p:cNvSpPr txBox="1"/>
+          <p:nvPr/>
+        </p:nvSpPr>
+        <p:spPr>
+          <a:xfrm>
+            <a:off x="10195559" y="4974336"/>
+            <a:ext cx="1463040" cy="274320"/>
+          </a:xfrm>
+          <a:prstGeom prst="rect">
+            <a:avLst/>
+          </a:prstGeom>
+          <a:noFill/>
+        </p:spPr>
+        <p:txBody>
+          <a:bodyPr wrap="square" lIns="45720" rIns="45720" tIns="27432" bIns="27432" anchor="t">
+            <a:spAutoFit/>
+          </a:bodyPr>
+          <a:lstStyle/>
+          <a:p>
+            <a:r>
+              <a:rPr sz="1100" b="0" i="0">
+                <a:solidFill>
+                  <a:srgbClr val="243447"/>
+                </a:solidFill>
+                <a:latin typeface="Aptos"/>
+              </a:rPr>
+              <a:t>14, 15, 16</a:t>
+            </a:r>
+          </a:p>
+        </p:txBody>
+      </p:sp>
+      <p:sp>
+        <p:nvSpPr>
+          <p:cNvPr id="83" name="Rounded Rectangle 82"/>
           <p:cNvSpPr/>
           <p:nvPr/>
         </p:nvSpPr>
         <p:spPr>
           <a:xfrm>
-            <a:off x="6199632" y="5120640"/>
-            <a:ext cx="5486400" cy="1024128"/>
+            <a:off x="502920" y="5404104"/>
+            <a:ext cx="11183112" cy="640080"/>
           </a:xfrm>
           <a:prstGeom prst="roundRect">
             <a:avLst>
-              <a:gd name="adj" fmla="val 6000"/>
+              <a:gd name="adj" fmla="val 8000"/>
             </a:avLst>
           </a:prstGeom>
           <a:solidFill>
-            <a:srgbClr val="FFFFFF"/>
+            <a:srgbClr val="EEF2F6"/>
           </a:solidFill>
           <a:ln w="10160">
             <a:solidFill>
@@ -15676,120 +17417,18 @@
           </a:fontRef>
         </p:style>
         <p:txBody>
-          <a:bodyPr rtlCol="0" anchor="ctr"/>
+          <a:bodyPr rtlCol="0" anchor="ctr" wrap="square" lIns="73152" rIns="73152" tIns="27432" bIns="27432"/>
           <a:lstStyle/>
           <a:p>
             <a:pPr algn="ctr"/>
-          </a:p>
-        </p:txBody>
-      </p:sp>
-      <p:sp>
-        <p:nvSpPr>
-          <p:cNvPr id="32" name="TextBox 31"/>
-          <p:cNvSpPr txBox="1"/>
-          <p:nvPr/>
-        </p:nvSpPr>
-        <p:spPr>
-          <a:xfrm>
-            <a:off x="6345936" y="5212079"/>
-            <a:ext cx="5212080" cy="274320"/>
-          </a:xfrm>
-          <a:prstGeom prst="rect">
-            <a:avLst/>
-          </a:prstGeom>
-          <a:noFill/>
-        </p:spPr>
-        <p:txBody>
-          <a:bodyPr wrap="square" lIns="45720" rIns="45720" tIns="27432" bIns="27432" anchor="t">
-            <a:spAutoFit/>
-          </a:bodyPr>
-          <a:lstStyle/>
-          <a:p>
-            <a:r>
-              <a:rPr sz="1200" b="1" i="0">
-                <a:solidFill>
-                  <a:srgbClr val="0B1F33"/>
-                </a:solidFill>
-                <a:latin typeface="Aptos"/>
-              </a:rPr>
-              <a:t>No secrets, by design</a:t>
-            </a:r>
-          </a:p>
-        </p:txBody>
-      </p:sp>
-      <p:sp>
-        <p:nvSpPr>
-          <p:cNvPr id="33" name="TextBox 32"/>
-          <p:cNvSpPr txBox="1"/>
-          <p:nvPr/>
-        </p:nvSpPr>
-        <p:spPr>
-          <a:xfrm>
-            <a:off x="6345936" y="5522976"/>
-            <a:ext cx="5212080" cy="566928"/>
-          </a:xfrm>
-          <a:prstGeom prst="rect">
-            <a:avLst/>
-          </a:prstGeom>
-          <a:noFill/>
-        </p:spPr>
-        <p:txBody>
-          <a:bodyPr wrap="square" lIns="45720" rIns="45720" tIns="27432" bIns="27432" anchor="t">
-            <a:spAutoFit/>
-          </a:bodyPr>
-          <a:lstStyle/>
-          <a:p>
-            <a:r>
-              <a:rPr sz="1050" b="0" i="0">
-                <a:solidFill>
-                  <a:srgbClr val="243447"/>
-                </a:solidFill>
-                <a:latin typeface="Aptos"/>
-              </a:rPr>
-              <a:t>Nothing in the repo needs a key, so there is nothing to leak. The .gitignore excludes data and run folders. MIT license.</a:t>
-            </a:r>
-          </a:p>
-        </p:txBody>
-      </p:sp>
-      <p:sp>
-        <p:nvSpPr>
-          <p:cNvPr id="34" name="TextBox 33"/>
-          <p:cNvSpPr txBox="1"/>
-          <p:nvPr/>
-        </p:nvSpPr>
-        <p:spPr>
-          <a:xfrm>
-            <a:off x="502920" y="6217920"/>
-            <a:ext cx="11183112" cy="320040"/>
-          </a:xfrm>
-          <a:prstGeom prst="rect">
-            <a:avLst/>
-          </a:prstGeom>
-          <a:noFill/>
-        </p:spPr>
-        <p:txBody>
-          <a:bodyPr wrap="square" lIns="45720" rIns="45720" tIns="27432" bIns="27432" anchor="t">
-            <a:spAutoFit/>
-          </a:bodyPr>
-          <a:lstStyle/>
-          <a:p>
-            <a:r>
-              <a:rPr sz="1400" b="1" i="0">
+            <a:r>
+              <a:rPr sz="1150" b="1" i="0">
                 <a:solidFill>
                   <a:srgbClr val="1769AA"/>
                 </a:solidFill>
                 <a:latin typeface="Aptos"/>
               </a:rPr>
-              <a:t>https://github.com/jimkliew/aiInvesting</a:t>
-            </a:r>
-            <a:r>
-              <a:rPr sz="1400" b="0" i="0">
-                <a:solidFill>
-                  <a:srgbClr val="667085"/>
-                </a:solidFill>
-                <a:latin typeface="Aptos"/>
-              </a:rPr>
-              <a:t>   open source under the MIT license</a:t>
+              <a:t>Questions for the room: did validation Sharpe predict the season? Did the coach's changes do what they expected? Would a run with the coach switched off look different?</a:t>
             </a:r>
           </a:p>
         </p:txBody>
@@ -16724,7 +18363,7 @@
                 </a:solidFill>
                 <a:latin typeface="Georgia"/>
               </a:rPr>
-              <a:t>Questions for the room</a:t>
+              <a:t>Run it yourself</a:t>
             </a:r>
           </a:p>
         </p:txBody>
@@ -16758,26 +18397,1244 @@
                 </a:solidFill>
                 <a:latin typeface="Aptos"/>
               </a:rPr>
-              <a:t>Argue from the numbers the dashboard shows</a:t>
-            </a:r>
-          </a:p>
-        </p:txBody>
-      </p:sp>
-      <p:sp>
-        <p:nvSpPr>
-          <p:cNvPr id="5" name="Rounded Rectangle 4"/>
+              <a:t>Everything is public. Clone it, pull one model, open the page</a:t>
+            </a:r>
+          </a:p>
+        </p:txBody>
+      </p:sp>
+      <p:sp>
+        <p:nvSpPr>
+          <p:cNvPr id="5" name="TextBox 4"/>
+          <p:cNvSpPr txBox="1"/>
+          <p:nvPr/>
+        </p:nvSpPr>
+        <p:spPr>
+          <a:xfrm>
+            <a:off x="10954512" y="6592824"/>
+            <a:ext cx="731520" cy="137160"/>
+          </a:xfrm>
+          <a:prstGeom prst="rect">
+            <a:avLst/>
+          </a:prstGeom>
+          <a:noFill/>
+        </p:spPr>
+        <p:txBody>
+          <a:bodyPr wrap="square" lIns="45720" rIns="45720" tIns="27432" bIns="27432" anchor="t">
+            <a:spAutoFit/>
+          </a:bodyPr>
+          <a:lstStyle/>
+          <a:p>
+            <a:pPr algn="r"/>
+            <a:r>
+              <a:rPr sz="750" b="0" i="0">
+                <a:solidFill>
+                  <a:srgbClr val="667085"/>
+                </a:solidFill>
+                <a:latin typeface="Aptos"/>
+              </a:rPr>
+              <a:t>20</a:t>
+            </a:r>
+          </a:p>
+        </p:txBody>
+      </p:sp>
+      <p:sp>
+        <p:nvSpPr>
+          <p:cNvPr id="6" name="TextBox 5"/>
+          <p:cNvSpPr txBox="1"/>
+          <p:nvPr/>
+        </p:nvSpPr>
+        <p:spPr>
+          <a:xfrm>
+            <a:off x="502920" y="6556248"/>
+            <a:ext cx="10094976" cy="228600"/>
+          </a:xfrm>
+          <a:prstGeom prst="rect">
+            <a:avLst/>
+          </a:prstGeom>
+          <a:noFill/>
+        </p:spPr>
+        <p:txBody>
+          <a:bodyPr wrap="square" lIns="45720" rIns="45720" tIns="27432" bIns="27432" anchor="t">
+            <a:spAutoFit/>
+          </a:bodyPr>
+          <a:lstStyle/>
+          <a:p>
+            <a:r>
+              <a:rPr sz="750" b="0" i="0">
+                <a:solidFill>
+                  <a:srgbClr val="667085"/>
+                </a:solidFill>
+                <a:latin typeface="Aptos"/>
+              </a:rPr>
+              <a:t>Published Oct 24, 2026: design spec, dashboard and the Python package are in the repo. 52 offline tests; verified end to end against Ollama with real data.</a:t>
+            </a:r>
+          </a:p>
+        </p:txBody>
+      </p:sp>
+      <p:sp>
+        <p:nvSpPr>
+          <p:cNvPr id="7" name="Rounded Rectangle 6"/>
           <p:cNvSpPr/>
           <p:nvPr/>
         </p:nvSpPr>
         <p:spPr>
           <a:xfrm>
             <a:off x="502920" y="1005840"/>
-            <a:ext cx="11183112" cy="493776"/>
+            <a:ext cx="6675120" cy="2423160"/>
           </a:xfrm>
           <a:prstGeom prst="roundRect">
             <a:avLst>
-              <a:gd name="adj" fmla="val 12000"/>
+              <a:gd name="adj" fmla="val 6000"/>
             </a:avLst>
+          </a:prstGeom>
+          <a:solidFill>
+            <a:srgbClr val="F6F8FA"/>
+          </a:solidFill>
+          <a:ln w="10160">
+            <a:solidFill>
+              <a:srgbClr val="DDE3EA"/>
+            </a:solidFill>
+          </a:ln>
+          <a:effectLst/>
+        </p:spPr>
+        <p:style>
+          <a:lnRef idx="1">
+            <a:schemeClr val="accent1"/>
+          </a:lnRef>
+          <a:fillRef idx="3">
+            <a:schemeClr val="accent1"/>
+          </a:fillRef>
+          <a:effectRef idx="2">
+            <a:schemeClr val="accent1"/>
+          </a:effectRef>
+          <a:fontRef idx="minor">
+            <a:schemeClr val="lt1"/>
+          </a:fontRef>
+        </p:style>
+        <p:txBody>
+          <a:bodyPr rtlCol="0" anchor="ctr"/>
+          <a:lstStyle/>
+          <a:p>
+            <a:pPr algn="ctr"/>
+          </a:p>
+        </p:txBody>
+      </p:sp>
+      <p:sp>
+        <p:nvSpPr>
+          <p:cNvPr id="8" name="TextBox 7"/>
+          <p:cNvSpPr txBox="1"/>
+          <p:nvPr/>
+        </p:nvSpPr>
+        <p:spPr>
+          <a:xfrm>
+            <a:off x="630936" y="1078992"/>
+            <a:ext cx="6419088" cy="201168"/>
+          </a:xfrm>
+          <a:prstGeom prst="rect">
+            <a:avLst/>
+          </a:prstGeom>
+          <a:noFill/>
+        </p:spPr>
+        <p:txBody>
+          <a:bodyPr wrap="square" lIns="45720" rIns="45720" tIns="27432" bIns="27432" anchor="t">
+            <a:spAutoFit/>
+          </a:bodyPr>
+          <a:lstStyle/>
+          <a:p>
+            <a:r>
+              <a:rPr sz="750" b="1" i="0">
+                <a:solidFill>
+                  <a:srgbClr val="1769AA"/>
+                </a:solidFill>
+                <a:latin typeface="Aptos"/>
+              </a:rPr>
+              <a:t>Three commands</a:t>
+            </a:r>
+          </a:p>
+        </p:txBody>
+      </p:sp>
+      <p:sp>
+        <p:nvSpPr>
+          <p:cNvPr id="9" name="TextBox 8"/>
+          <p:cNvSpPr txBox="1"/>
+          <p:nvPr/>
+        </p:nvSpPr>
+        <p:spPr>
+          <a:xfrm>
+            <a:off x="630936" y="1316736"/>
+            <a:ext cx="6419088" cy="2039111"/>
+          </a:xfrm>
+          <a:prstGeom prst="rect">
+            <a:avLst/>
+          </a:prstGeom>
+          <a:noFill/>
+        </p:spPr>
+        <p:txBody>
+          <a:bodyPr wrap="square" lIns="18288" rIns="18288" tIns="27432" bIns="27432" anchor="t">
+            <a:spAutoFit/>
+          </a:bodyPr>
+          <a:lstStyle/>
+          <a:p>
+            <a:r>
+              <a:rPr sz="950" b="0" i="0">
+                <a:solidFill>
+                  <a:srgbClr val="0B1F33"/>
+                </a:solidFill>
+                <a:latin typeface="Courier New"/>
+              </a:rPr>
+              <a:t>ollama pull qwen3:8b</a:t>
+            </a:r>
+          </a:p>
+          <a:p>
+            <a:r>
+              <a:rPr sz="950" b="0" i="0">
+                <a:solidFill>
+                  <a:srgbClr val="0B1F33"/>
+                </a:solidFill>
+                <a:latin typeface="Courier New"/>
+              </a:rPr>
+              <a:t>git clone https://github.com/jimkliew/aiInvesting.git &amp;&amp; cd aiInvesting</a:t>
+            </a:r>
+          </a:p>
+          <a:p>
+            <a:r>
+              <a:rPr sz="950" b="0" i="0">
+                <a:solidFill>
+                  <a:srgbClr val="0B1F33"/>
+                </a:solidFill>
+                <a:latin typeface="Courier New"/>
+              </a:rPr>
+              <a:t>uv run python -m aitrader serve          # http://localhost:8000, click Run campaign</a:t>
+            </a:r>
+          </a:p>
+          <a:p>
+            <a:r>
+              <a:rPr sz="950" b="0" i="0">
+                <a:solidFill>
+                  <a:srgbClr val="0B1F33"/>
+                </a:solidFill>
+                <a:latin typeface="Courier New"/>
+              </a:rPr>
+              <a:t/>
+            </a:r>
+          </a:p>
+          <a:p>
+            <a:r>
+              <a:rPr sz="950" b="0" i="0">
+                <a:solidFill>
+                  <a:srgbClr val="0B1F33"/>
+                </a:solidFill>
+                <a:latin typeface="Courier New"/>
+              </a:rPr>
+              <a:t># or the command line</a:t>
+            </a:r>
+          </a:p>
+          <a:p>
+            <a:r>
+              <a:rPr sz="950" b="0" i="0">
+                <a:solidFill>
+                  <a:srgbClr val="0B1F33"/>
+                </a:solidFill>
+                <a:latin typeface="Courier New"/>
+              </a:rPr>
+              <a:t>uv run python -m aitrader campaign --quick               # 2 short seasons, ~2 min</a:t>
+            </a:r>
+          </a:p>
+          <a:p>
+            <a:r>
+              <a:rPr sz="950" b="0" i="0">
+                <a:solidFill>
+                  <a:srgbClr val="0B1F33"/>
+                </a:solidFill>
+                <a:latin typeface="Courier New"/>
+              </a:rPr>
+              <a:t>uv run python -m aitrader campaign --personas momentum,contrarian --apply approve</a:t>
+            </a:r>
+          </a:p>
+          <a:p>
+            <a:r>
+              <a:rPr sz="950" b="0" i="0">
+                <a:solidFill>
+                  <a:srgbClr val="0B1F33"/>
+                </a:solidFill>
+                <a:latin typeface="Courier New"/>
+              </a:rPr>
+              <a:t>uv run python -m aitrader replay runs/&lt;campaign&gt; --speed 5</a:t>
+            </a:r>
+          </a:p>
+          <a:p>
+            <a:r>
+              <a:rPr sz="950" b="0" i="0">
+                <a:solidFill>
+                  <a:srgbClr val="0B1F33"/>
+                </a:solidFill>
+                <a:latin typeface="Courier New"/>
+              </a:rPr>
+              <a:t>uv run pytest                                            # 52 offline tests</a:t>
+            </a:r>
+          </a:p>
+        </p:txBody>
+      </p:sp>
+      <p:sp>
+        <p:nvSpPr>
+          <p:cNvPr id="10" name="Rounded Rectangle 9"/>
+          <p:cNvSpPr/>
+          <p:nvPr/>
+        </p:nvSpPr>
+        <p:spPr>
+          <a:xfrm>
+            <a:off x="7360920" y="1005840"/>
+            <a:ext cx="4325112" cy="2423160"/>
+          </a:xfrm>
+          <a:prstGeom prst="roundRect">
+            <a:avLst>
+              <a:gd name="adj" fmla="val 6000"/>
+            </a:avLst>
+          </a:prstGeom>
+          <a:solidFill>
+            <a:srgbClr val="FFFFFF"/>
+          </a:solidFill>
+          <a:ln w="10160">
+            <a:solidFill>
+              <a:srgbClr val="DDE3EA"/>
+            </a:solidFill>
+          </a:ln>
+          <a:effectLst/>
+        </p:spPr>
+        <p:style>
+          <a:lnRef idx="1">
+            <a:schemeClr val="accent1"/>
+          </a:lnRef>
+          <a:fillRef idx="3">
+            <a:schemeClr val="accent1"/>
+          </a:fillRef>
+          <a:effectRef idx="2">
+            <a:schemeClr val="accent1"/>
+          </a:effectRef>
+          <a:fontRef idx="minor">
+            <a:schemeClr val="lt1"/>
+          </a:fontRef>
+        </p:style>
+        <p:txBody>
+          <a:bodyPr rtlCol="0" anchor="ctr"/>
+          <a:lstStyle/>
+          <a:p>
+            <a:pPr algn="ctr"/>
+          </a:p>
+        </p:txBody>
+      </p:sp>
+      <p:sp>
+        <p:nvSpPr>
+          <p:cNvPr id="11" name="TextBox 10"/>
+          <p:cNvSpPr txBox="1"/>
+          <p:nvPr/>
+        </p:nvSpPr>
+        <p:spPr>
+          <a:xfrm>
+            <a:off x="7507224" y="1097280"/>
+            <a:ext cx="4023360" cy="219456"/>
+          </a:xfrm>
+          <a:prstGeom prst="rect">
+            <a:avLst/>
+          </a:prstGeom>
+          <a:noFill/>
+        </p:spPr>
+        <p:txBody>
+          <a:bodyPr wrap="square" lIns="45720" rIns="45720" tIns="27432" bIns="27432" anchor="t">
+            <a:spAutoFit/>
+          </a:bodyPr>
+          <a:lstStyle/>
+          <a:p>
+            <a:r>
+              <a:rPr sz="950" b="1" i="0">
+                <a:solidFill>
+                  <a:srgbClr val="1769AA"/>
+                </a:solidFill>
+                <a:latin typeface="Aptos"/>
+              </a:rPr>
+              <a:t>WHICH MODEL FOR WHICH LAPTOP</a:t>
+            </a:r>
+          </a:p>
+        </p:txBody>
+      </p:sp>
+      <p:sp>
+        <p:nvSpPr>
+          <p:cNvPr id="12" name="TextBox 11"/>
+          <p:cNvSpPr txBox="1"/>
+          <p:nvPr/>
+        </p:nvSpPr>
+        <p:spPr>
+          <a:xfrm>
+            <a:off x="7507224" y="1389888"/>
+            <a:ext cx="822960" cy="274320"/>
+          </a:xfrm>
+          <a:prstGeom prst="rect">
+            <a:avLst/>
+          </a:prstGeom>
+          <a:noFill/>
+        </p:spPr>
+        <p:txBody>
+          <a:bodyPr wrap="square" lIns="45720" rIns="45720" tIns="27432" bIns="27432" anchor="t">
+            <a:spAutoFit/>
+          </a:bodyPr>
+          <a:lstStyle/>
+          <a:p>
+            <a:r>
+              <a:rPr sz="1300" b="1" i="0">
+                <a:solidFill>
+                  <a:srgbClr val="002D72"/>
+                </a:solidFill>
+                <a:latin typeface="Georgia"/>
+              </a:rPr>
+              <a:t>8 GB</a:t>
+            </a:r>
+          </a:p>
+        </p:txBody>
+      </p:sp>
+      <p:sp>
+        <p:nvSpPr>
+          <p:cNvPr id="13" name="TextBox 12"/>
+          <p:cNvSpPr txBox="1"/>
+          <p:nvPr/>
+        </p:nvSpPr>
+        <p:spPr>
+          <a:xfrm>
+            <a:off x="8366760" y="1389888"/>
+            <a:ext cx="1280160" cy="274320"/>
+          </a:xfrm>
+          <a:prstGeom prst="rect">
+            <a:avLst/>
+          </a:prstGeom>
+          <a:noFill/>
+        </p:spPr>
+        <p:txBody>
+          <a:bodyPr wrap="square" lIns="45720" rIns="45720" tIns="27432" bIns="27432" anchor="t">
+            <a:spAutoFit/>
+          </a:bodyPr>
+          <a:lstStyle/>
+          <a:p>
+            <a:r>
+              <a:rPr sz="1100" b="1" i="0">
+                <a:solidFill>
+                  <a:srgbClr val="0B1F33"/>
+                </a:solidFill>
+                <a:latin typeface="Courier New"/>
+              </a:rPr>
+              <a:t>qwen3:4b</a:t>
+            </a:r>
+          </a:p>
+        </p:txBody>
+      </p:sp>
+      <p:sp>
+        <p:nvSpPr>
+          <p:cNvPr id="14" name="TextBox 13"/>
+          <p:cNvSpPr txBox="1"/>
+          <p:nvPr/>
+        </p:nvSpPr>
+        <p:spPr>
+          <a:xfrm>
+            <a:off x="8366760" y="1645920"/>
+            <a:ext cx="3200400" cy="329184"/>
+          </a:xfrm>
+          <a:prstGeom prst="rect">
+            <a:avLst/>
+          </a:prstGeom>
+          <a:noFill/>
+        </p:spPr>
+        <p:txBody>
+          <a:bodyPr wrap="square" lIns="45720" rIns="45720" tIns="27432" bIns="27432" anchor="t">
+            <a:spAutoFit/>
+          </a:bodyPr>
+          <a:lstStyle/>
+          <a:p>
+            <a:r>
+              <a:rPr sz="1000" b="0" i="0">
+                <a:solidFill>
+                  <a:srgbClr val="243447"/>
+                </a:solidFill>
+                <a:latin typeface="Aptos"/>
+              </a:rPr>
+              <a:t>slower; run 3 seasons; use Replay in class</a:t>
+            </a:r>
+          </a:p>
+        </p:txBody>
+      </p:sp>
+      <p:sp>
+        <p:nvSpPr>
+          <p:cNvPr id="15" name="TextBox 14"/>
+          <p:cNvSpPr txBox="1"/>
+          <p:nvPr/>
+        </p:nvSpPr>
+        <p:spPr>
+          <a:xfrm>
+            <a:off x="7507224" y="2029967"/>
+            <a:ext cx="822960" cy="274320"/>
+          </a:xfrm>
+          <a:prstGeom prst="rect">
+            <a:avLst/>
+          </a:prstGeom>
+          <a:noFill/>
+        </p:spPr>
+        <p:txBody>
+          <a:bodyPr wrap="square" lIns="45720" rIns="45720" tIns="27432" bIns="27432" anchor="t">
+            <a:spAutoFit/>
+          </a:bodyPr>
+          <a:lstStyle/>
+          <a:p>
+            <a:r>
+              <a:rPr sz="1300" b="1" i="0">
+                <a:solidFill>
+                  <a:srgbClr val="002D72"/>
+                </a:solidFill>
+                <a:latin typeface="Georgia"/>
+              </a:rPr>
+              <a:t>16 GB</a:t>
+            </a:r>
+          </a:p>
+        </p:txBody>
+      </p:sp>
+      <p:sp>
+        <p:nvSpPr>
+          <p:cNvPr id="16" name="TextBox 15"/>
+          <p:cNvSpPr txBox="1"/>
+          <p:nvPr/>
+        </p:nvSpPr>
+        <p:spPr>
+          <a:xfrm>
+            <a:off x="8366760" y="2029967"/>
+            <a:ext cx="1280160" cy="274320"/>
+          </a:xfrm>
+          <a:prstGeom prst="rect">
+            <a:avLst/>
+          </a:prstGeom>
+          <a:noFill/>
+        </p:spPr>
+        <p:txBody>
+          <a:bodyPr wrap="square" lIns="45720" rIns="45720" tIns="27432" bIns="27432" anchor="t">
+            <a:spAutoFit/>
+          </a:bodyPr>
+          <a:lstStyle/>
+          <a:p>
+            <a:r>
+              <a:rPr sz="1100" b="1" i="0">
+                <a:solidFill>
+                  <a:srgbClr val="0B1F33"/>
+                </a:solidFill>
+                <a:latin typeface="Courier New"/>
+              </a:rPr>
+              <a:t>qwen3:8b</a:t>
+            </a:r>
+          </a:p>
+        </p:txBody>
+      </p:sp>
+      <p:sp>
+        <p:nvSpPr>
+          <p:cNvPr id="17" name="TextBox 16"/>
+          <p:cNvSpPr txBox="1"/>
+          <p:nvPr/>
+        </p:nvSpPr>
+        <p:spPr>
+          <a:xfrm>
+            <a:off x="8366760" y="2286000"/>
+            <a:ext cx="3200400" cy="329184"/>
+          </a:xfrm>
+          <a:prstGeom prst="rect">
+            <a:avLst/>
+          </a:prstGeom>
+          <a:noFill/>
+        </p:spPr>
+        <p:txBody>
+          <a:bodyPr wrap="square" lIns="45720" rIns="45720" tIns="27432" bIns="27432" anchor="t">
+            <a:spAutoFit/>
+          </a:bodyPr>
+          <a:lstStyle/>
+          <a:p>
+            <a:r>
+              <a:rPr sz="1000" b="0" i="0">
+                <a:solidFill>
+                  <a:srgbClr val="243447"/>
+                </a:solidFill>
+                <a:latin typeface="Aptos"/>
+              </a:rPr>
+              <a:t>the default, verified</a:t>
+            </a:r>
+          </a:p>
+        </p:txBody>
+      </p:sp>
+      <p:sp>
+        <p:nvSpPr>
+          <p:cNvPr id="18" name="TextBox 17"/>
+          <p:cNvSpPr txBox="1"/>
+          <p:nvPr/>
+        </p:nvSpPr>
+        <p:spPr>
+          <a:xfrm>
+            <a:off x="7507224" y="2670048"/>
+            <a:ext cx="822960" cy="274320"/>
+          </a:xfrm>
+          <a:prstGeom prst="rect">
+            <a:avLst/>
+          </a:prstGeom>
+          <a:noFill/>
+        </p:spPr>
+        <p:txBody>
+          <a:bodyPr wrap="square" lIns="45720" rIns="45720" tIns="27432" bIns="27432" anchor="t">
+            <a:spAutoFit/>
+          </a:bodyPr>
+          <a:lstStyle/>
+          <a:p>
+            <a:r>
+              <a:rPr sz="1300" b="1" i="0">
+                <a:solidFill>
+                  <a:srgbClr val="002D72"/>
+                </a:solidFill>
+                <a:latin typeface="Georgia"/>
+              </a:rPr>
+              <a:t>32 GB+</a:t>
+            </a:r>
+          </a:p>
+        </p:txBody>
+      </p:sp>
+      <p:sp>
+        <p:nvSpPr>
+          <p:cNvPr id="19" name="TextBox 18"/>
+          <p:cNvSpPr txBox="1"/>
+          <p:nvPr/>
+        </p:nvSpPr>
+        <p:spPr>
+          <a:xfrm>
+            <a:off x="8366760" y="2670048"/>
+            <a:ext cx="1280160" cy="274320"/>
+          </a:xfrm>
+          <a:prstGeom prst="rect">
+            <a:avLst/>
+          </a:prstGeom>
+          <a:noFill/>
+        </p:spPr>
+        <p:txBody>
+          <a:bodyPr wrap="square" lIns="45720" rIns="45720" tIns="27432" bIns="27432" anchor="t">
+            <a:spAutoFit/>
+          </a:bodyPr>
+          <a:lstStyle/>
+          <a:p>
+            <a:r>
+              <a:rPr sz="1100" b="1" i="0">
+                <a:solidFill>
+                  <a:srgbClr val="0B1F33"/>
+                </a:solidFill>
+                <a:latin typeface="Courier New"/>
+              </a:rPr>
+              <a:t>qwen3:14b</a:t>
+            </a:r>
+          </a:p>
+        </p:txBody>
+      </p:sp>
+      <p:sp>
+        <p:nvSpPr>
+          <p:cNvPr id="20" name="TextBox 19"/>
+          <p:cNvSpPr txBox="1"/>
+          <p:nvPr/>
+        </p:nvSpPr>
+        <p:spPr>
+          <a:xfrm>
+            <a:off x="8366760" y="2926080"/>
+            <a:ext cx="3200400" cy="329184"/>
+          </a:xfrm>
+          <a:prstGeom prst="rect">
+            <a:avLst/>
+          </a:prstGeom>
+          <a:noFill/>
+        </p:spPr>
+        <p:txBody>
+          <a:bodyPr wrap="square" lIns="45720" rIns="45720" tIns="27432" bIns="27432" anchor="t">
+            <a:spAutoFit/>
+          </a:bodyPr>
+          <a:lstStyle/>
+          <a:p>
+            <a:r>
+              <a:rPr sz="1000" b="0" i="0">
+                <a:solidFill>
+                  <a:srgbClr val="243447"/>
+                </a:solidFill>
+                <a:latin typeface="Aptos"/>
+              </a:rPr>
+              <a:t>better code, about twice as slow</a:t>
+            </a:r>
+          </a:p>
+        </p:txBody>
+      </p:sp>
+      <p:sp>
+        <p:nvSpPr>
+          <p:cNvPr id="21" name="TextBox 20"/>
+          <p:cNvSpPr txBox="1"/>
+          <p:nvPr/>
+        </p:nvSpPr>
+        <p:spPr>
+          <a:xfrm>
+            <a:off x="502920" y="3657600"/>
+            <a:ext cx="11183112" cy="228600"/>
+          </a:xfrm>
+          <a:prstGeom prst="rect">
+            <a:avLst/>
+          </a:prstGeom>
+          <a:noFill/>
+        </p:spPr>
+        <p:txBody>
+          <a:bodyPr wrap="square" lIns="45720" rIns="45720" tIns="27432" bIns="27432" anchor="t">
+            <a:spAutoFit/>
+          </a:bodyPr>
+          <a:lstStyle/>
+          <a:p>
+            <a:r>
+              <a:rPr sz="1050" b="1" i="0">
+                <a:solidFill>
+                  <a:srgbClr val="1769AA"/>
+                </a:solidFill>
+                <a:latin typeface="Aptos"/>
+              </a:rPr>
+              <a:t>IN THE REPO</a:t>
+            </a:r>
+          </a:p>
+        </p:txBody>
+      </p:sp>
+      <p:sp>
+        <p:nvSpPr>
+          <p:cNvPr id="22" name="Rounded Rectangle 21"/>
+          <p:cNvSpPr/>
+          <p:nvPr/>
+        </p:nvSpPr>
+        <p:spPr>
+          <a:xfrm>
+            <a:off x="502920" y="3977639"/>
+            <a:ext cx="5486400" cy="1024128"/>
+          </a:xfrm>
+          <a:prstGeom prst="roundRect">
+            <a:avLst>
+              <a:gd name="adj" fmla="val 6000"/>
+            </a:avLst>
+          </a:prstGeom>
+          <a:solidFill>
+            <a:srgbClr val="FFFFFF"/>
+          </a:solidFill>
+          <a:ln w="10160">
+            <a:solidFill>
+              <a:srgbClr val="DDE3EA"/>
+            </a:solidFill>
+          </a:ln>
+          <a:effectLst/>
+        </p:spPr>
+        <p:style>
+          <a:lnRef idx="1">
+            <a:schemeClr val="accent1"/>
+          </a:lnRef>
+          <a:fillRef idx="3">
+            <a:schemeClr val="accent1"/>
+          </a:fillRef>
+          <a:effectRef idx="2">
+            <a:schemeClr val="accent1"/>
+          </a:effectRef>
+          <a:fontRef idx="minor">
+            <a:schemeClr val="lt1"/>
+          </a:fontRef>
+        </p:style>
+        <p:txBody>
+          <a:bodyPr rtlCol="0" anchor="ctr"/>
+          <a:lstStyle/>
+          <a:p>
+            <a:pPr algn="ctr"/>
+          </a:p>
+        </p:txBody>
+      </p:sp>
+      <p:sp>
+        <p:nvSpPr>
+          <p:cNvPr id="23" name="TextBox 22"/>
+          <p:cNvSpPr txBox="1"/>
+          <p:nvPr/>
+        </p:nvSpPr>
+        <p:spPr>
+          <a:xfrm>
+            <a:off x="649224" y="4069079"/>
+            <a:ext cx="5212080" cy="274320"/>
+          </a:xfrm>
+          <a:prstGeom prst="rect">
+            <a:avLst/>
+          </a:prstGeom>
+          <a:noFill/>
+        </p:spPr>
+        <p:txBody>
+          <a:bodyPr wrap="square" lIns="45720" rIns="45720" tIns="27432" bIns="27432" anchor="t">
+            <a:spAutoFit/>
+          </a:bodyPr>
+          <a:lstStyle/>
+          <a:p>
+            <a:r>
+              <a:rPr sz="1200" b="1" i="0">
+                <a:solidFill>
+                  <a:srgbClr val="0B1F33"/>
+                </a:solidFill>
+                <a:latin typeface="Courier New"/>
+              </a:rPr>
+              <a:t>docs/superpowers/specs/</a:t>
+            </a:r>
+          </a:p>
+        </p:txBody>
+      </p:sp>
+      <p:sp>
+        <p:nvSpPr>
+          <p:cNvPr id="24" name="TextBox 23"/>
+          <p:cNvSpPr txBox="1"/>
+          <p:nvPr/>
+        </p:nvSpPr>
+        <p:spPr>
+          <a:xfrm>
+            <a:off x="649224" y="4379976"/>
+            <a:ext cx="5212080" cy="566928"/>
+          </a:xfrm>
+          <a:prstGeom prst="rect">
+            <a:avLst/>
+          </a:prstGeom>
+          <a:noFill/>
+        </p:spPr>
+        <p:txBody>
+          <a:bodyPr wrap="square" lIns="45720" rIns="45720" tIns="27432" bIns="27432" anchor="t">
+            <a:spAutoFit/>
+          </a:bodyPr>
+          <a:lstStyle/>
+          <a:p>
+            <a:r>
+              <a:rPr sz="1050" b="0" i="0">
+                <a:solidFill>
+                  <a:srgbClr val="243447"/>
+                </a:solidFill>
+                <a:latin typeface="Aptos"/>
+              </a:rPr>
+              <a:t>The full design: roles, phases, schemas, lever menu, budgets, error handling, test plan, two-day build schedule.</a:t>
+            </a:r>
+          </a:p>
+        </p:txBody>
+      </p:sp>
+      <p:sp>
+        <p:nvSpPr>
+          <p:cNvPr id="25" name="Rounded Rectangle 24"/>
+          <p:cNvSpPr/>
+          <p:nvPr/>
+        </p:nvSpPr>
+        <p:spPr>
+          <a:xfrm>
+            <a:off x="6199632" y="3977639"/>
+            <a:ext cx="5486400" cy="1024128"/>
+          </a:xfrm>
+          <a:prstGeom prst="roundRect">
+            <a:avLst>
+              <a:gd name="adj" fmla="val 6000"/>
+            </a:avLst>
+          </a:prstGeom>
+          <a:solidFill>
+            <a:srgbClr val="FFFFFF"/>
+          </a:solidFill>
+          <a:ln w="10160">
+            <a:solidFill>
+              <a:srgbClr val="DDE3EA"/>
+            </a:solidFill>
+          </a:ln>
+          <a:effectLst/>
+        </p:spPr>
+        <p:style>
+          <a:lnRef idx="1">
+            <a:schemeClr val="accent1"/>
+          </a:lnRef>
+          <a:fillRef idx="3">
+            <a:schemeClr val="accent1"/>
+          </a:fillRef>
+          <a:effectRef idx="2">
+            <a:schemeClr val="accent1"/>
+          </a:effectRef>
+          <a:fontRef idx="minor">
+            <a:schemeClr val="lt1"/>
+          </a:fontRef>
+        </p:style>
+        <p:txBody>
+          <a:bodyPr rtlCol="0" anchor="ctr"/>
+          <a:lstStyle/>
+          <a:p>
+            <a:pPr algn="ctr"/>
+          </a:p>
+        </p:txBody>
+      </p:sp>
+      <p:sp>
+        <p:nvSpPr>
+          <p:cNvPr id="26" name="TextBox 25"/>
+          <p:cNvSpPr txBox="1"/>
+          <p:nvPr/>
+        </p:nvSpPr>
+        <p:spPr>
+          <a:xfrm>
+            <a:off x="6345936" y="4069079"/>
+            <a:ext cx="5212080" cy="274320"/>
+          </a:xfrm>
+          <a:prstGeom prst="rect">
+            <a:avLst/>
+          </a:prstGeom>
+          <a:noFill/>
+        </p:spPr>
+        <p:txBody>
+          <a:bodyPr wrap="square" lIns="45720" rIns="45720" tIns="27432" bIns="27432" anchor="t">
+            <a:spAutoFit/>
+          </a:bodyPr>
+          <a:lstStyle/>
+          <a:p>
+            <a:r>
+              <a:rPr sz="1200" b="1" i="0">
+                <a:solidFill>
+                  <a:srgbClr val="0B1F33"/>
+                </a:solidFill>
+                <a:latin typeface="Courier New"/>
+              </a:rPr>
+              <a:t>docs/mockups/mission-control.html</a:t>
+            </a:r>
+          </a:p>
+        </p:txBody>
+      </p:sp>
+      <p:sp>
+        <p:nvSpPr>
+          <p:cNvPr id="27" name="TextBox 26"/>
+          <p:cNvSpPr txBox="1"/>
+          <p:nvPr/>
+        </p:nvSpPr>
+        <p:spPr>
+          <a:xfrm>
+            <a:off x="6345936" y="4379976"/>
+            <a:ext cx="5212080" cy="566928"/>
+          </a:xfrm>
+          <a:prstGeom prst="rect">
+            <a:avLst/>
+          </a:prstGeom>
+          <a:noFill/>
+        </p:spPr>
+        <p:txBody>
+          <a:bodyPr wrap="square" lIns="45720" rIns="45720" tIns="27432" bIns="27432" anchor="t">
+            <a:spAutoFit/>
+          </a:bodyPr>
+          <a:lstStyle/>
+          <a:p>
+            <a:r>
+              <a:rPr sz="1050" b="0" i="0">
+                <a:solidFill>
+                  <a:srgbClr val="243447"/>
+                </a:solidFill>
+                <a:latin typeface="Aptos"/>
+              </a:rPr>
+              <a:t>The dashboard you just saw. One file, open it in any browser, no server needed.</a:t>
+            </a:r>
+          </a:p>
+        </p:txBody>
+      </p:sp>
+      <p:sp>
+        <p:nvSpPr>
+          <p:cNvPr id="28" name="Rounded Rectangle 27"/>
+          <p:cNvSpPr/>
+          <p:nvPr/>
+        </p:nvSpPr>
+        <p:spPr>
+          <a:xfrm>
+            <a:off x="502920" y="5120640"/>
+            <a:ext cx="5486400" cy="1024128"/>
+          </a:xfrm>
+          <a:prstGeom prst="roundRect">
+            <a:avLst>
+              <a:gd name="adj" fmla="val 6000"/>
+            </a:avLst>
+          </a:prstGeom>
+          <a:solidFill>
+            <a:srgbClr val="FFFFFF"/>
+          </a:solidFill>
+          <a:ln w="10160">
+            <a:solidFill>
+              <a:srgbClr val="DDE3EA"/>
+            </a:solidFill>
+          </a:ln>
+          <a:effectLst/>
+        </p:spPr>
+        <p:style>
+          <a:lnRef idx="1">
+            <a:schemeClr val="accent1"/>
+          </a:lnRef>
+          <a:fillRef idx="3">
+            <a:schemeClr val="accent1"/>
+          </a:fillRef>
+          <a:effectRef idx="2">
+            <a:schemeClr val="accent1"/>
+          </a:effectRef>
+          <a:fontRef idx="minor">
+            <a:schemeClr val="lt1"/>
+          </a:fontRef>
+        </p:style>
+        <p:txBody>
+          <a:bodyPr rtlCol="0" anchor="ctr"/>
+          <a:lstStyle/>
+          <a:p>
+            <a:pPr algn="ctr"/>
+          </a:p>
+        </p:txBody>
+      </p:sp>
+      <p:sp>
+        <p:nvSpPr>
+          <p:cNvPr id="29" name="TextBox 28"/>
+          <p:cNvSpPr txBox="1"/>
+          <p:nvPr/>
+        </p:nvSpPr>
+        <p:spPr>
+          <a:xfrm>
+            <a:off x="649224" y="5212079"/>
+            <a:ext cx="5212080" cy="274320"/>
+          </a:xfrm>
+          <a:prstGeom prst="rect">
+            <a:avLst/>
+          </a:prstGeom>
+          <a:noFill/>
+        </p:spPr>
+        <p:txBody>
+          <a:bodyPr wrap="square" lIns="45720" rIns="45720" tIns="27432" bIns="27432" anchor="t">
+            <a:spAutoFit/>
+          </a:bodyPr>
+          <a:lstStyle/>
+          <a:p>
+            <a:r>
+              <a:rPr sz="1200" b="1" i="0">
+                <a:solidFill>
+                  <a:srgbClr val="0B1F33"/>
+                </a:solidFill>
+                <a:latin typeface="Courier New"/>
+              </a:rPr>
+              <a:t>aitrader/</a:t>
+            </a:r>
+          </a:p>
+        </p:txBody>
+      </p:sp>
+      <p:sp>
+        <p:nvSpPr>
+          <p:cNvPr id="30" name="TextBox 29"/>
+          <p:cNvSpPr txBox="1"/>
+          <p:nvPr/>
+        </p:nvSpPr>
+        <p:spPr>
+          <a:xfrm>
+            <a:off x="649224" y="5522976"/>
+            <a:ext cx="5212080" cy="566928"/>
+          </a:xfrm>
+          <a:prstGeom prst="rect">
+            <a:avLst/>
+          </a:prstGeom>
+          <a:noFill/>
+        </p:spPr>
+        <p:txBody>
+          <a:bodyPr wrap="square" lIns="45720" rIns="45720" tIns="27432" bIns="27432" anchor="t">
+            <a:spAutoFit/>
+          </a:bodyPr>
+          <a:lstStyle/>
+          <a:p>
+            <a:r>
+              <a:rPr sz="1050" b="0" i="0">
+                <a:solidFill>
+                  <a:srgbClr val="243447"/>
+                </a:solidFill>
+                <a:latin typeface="Aptos"/>
+              </a:rPr>
+              <a:t>The package: orchestrator, agents, prompts, levers, sandbox, engine, web server. 52 tests run offline with a fake model.</a:t>
+            </a:r>
+          </a:p>
+        </p:txBody>
+      </p:sp>
+      <p:sp>
+        <p:nvSpPr>
+          <p:cNvPr id="31" name="Rounded Rectangle 30"/>
+          <p:cNvSpPr/>
+          <p:nvPr/>
+        </p:nvSpPr>
+        <p:spPr>
+          <a:xfrm>
+            <a:off x="6199632" y="5120640"/>
+            <a:ext cx="5486400" cy="1024128"/>
+          </a:xfrm>
+          <a:prstGeom prst="roundRect">
+            <a:avLst>
+              <a:gd name="adj" fmla="val 6000"/>
+            </a:avLst>
+          </a:prstGeom>
+          <a:solidFill>
+            <a:srgbClr val="FFFFFF"/>
+          </a:solidFill>
+          <a:ln w="10160">
+            <a:solidFill>
+              <a:srgbClr val="DDE3EA"/>
+            </a:solidFill>
+          </a:ln>
+          <a:effectLst/>
+        </p:spPr>
+        <p:style>
+          <a:lnRef idx="1">
+            <a:schemeClr val="accent1"/>
+          </a:lnRef>
+          <a:fillRef idx="3">
+            <a:schemeClr val="accent1"/>
+          </a:fillRef>
+          <a:effectRef idx="2">
+            <a:schemeClr val="accent1"/>
+          </a:effectRef>
+          <a:fontRef idx="minor">
+            <a:schemeClr val="lt1"/>
+          </a:fontRef>
+        </p:style>
+        <p:txBody>
+          <a:bodyPr rtlCol="0" anchor="ctr"/>
+          <a:lstStyle/>
+          <a:p>
+            <a:pPr algn="ctr"/>
+          </a:p>
+        </p:txBody>
+      </p:sp>
+      <p:sp>
+        <p:nvSpPr>
+          <p:cNvPr id="32" name="TextBox 31"/>
+          <p:cNvSpPr txBox="1"/>
+          <p:nvPr/>
+        </p:nvSpPr>
+        <p:spPr>
+          <a:xfrm>
+            <a:off x="6345936" y="5212079"/>
+            <a:ext cx="5212080" cy="274320"/>
+          </a:xfrm>
+          <a:prstGeom prst="rect">
+            <a:avLst/>
+          </a:prstGeom>
+          <a:noFill/>
+        </p:spPr>
+        <p:txBody>
+          <a:bodyPr wrap="square" lIns="45720" rIns="45720" tIns="27432" bIns="27432" anchor="t">
+            <a:spAutoFit/>
+          </a:bodyPr>
+          <a:lstStyle/>
+          <a:p>
+            <a:r>
+              <a:rPr sz="1200" b="1" i="0">
+                <a:solidFill>
+                  <a:srgbClr val="0B1F33"/>
+                </a:solidFill>
+                <a:latin typeface="Aptos"/>
+              </a:rPr>
+              <a:t>No secrets, by design</a:t>
+            </a:r>
+          </a:p>
+        </p:txBody>
+      </p:sp>
+      <p:sp>
+        <p:nvSpPr>
+          <p:cNvPr id="33" name="TextBox 32"/>
+          <p:cNvSpPr txBox="1"/>
+          <p:nvPr/>
+        </p:nvSpPr>
+        <p:spPr>
+          <a:xfrm>
+            <a:off x="6345936" y="5522976"/>
+            <a:ext cx="5212080" cy="566928"/>
+          </a:xfrm>
+          <a:prstGeom prst="rect">
+            <a:avLst/>
+          </a:prstGeom>
+          <a:noFill/>
+        </p:spPr>
+        <p:txBody>
+          <a:bodyPr wrap="square" lIns="45720" rIns="45720" tIns="27432" bIns="27432" anchor="t">
+            <a:spAutoFit/>
+          </a:bodyPr>
+          <a:lstStyle/>
+          <a:p>
+            <a:r>
+              <a:rPr sz="1050" b="0" i="0">
+                <a:solidFill>
+                  <a:srgbClr val="243447"/>
+                </a:solidFill>
+                <a:latin typeface="Aptos"/>
+              </a:rPr>
+              <a:t>Nothing in the repo needs a key, so there is nothing to leak. The .gitignore excludes data and run folders. MIT license.</a:t>
+            </a:r>
+          </a:p>
+        </p:txBody>
+      </p:sp>
+      <p:sp>
+        <p:nvSpPr>
+          <p:cNvPr id="34" name="TextBox 33"/>
+          <p:cNvSpPr txBox="1"/>
+          <p:nvPr/>
+        </p:nvSpPr>
+        <p:spPr>
+          <a:xfrm>
+            <a:off x="502920" y="6217920"/>
+            <a:ext cx="11183112" cy="320040"/>
+          </a:xfrm>
+          <a:prstGeom prst="rect">
+            <a:avLst/>
+          </a:prstGeom>
+          <a:noFill/>
+        </p:spPr>
+        <p:txBody>
+          <a:bodyPr wrap="square" lIns="45720" rIns="45720" tIns="27432" bIns="27432" anchor="t">
+            <a:spAutoFit/>
+          </a:bodyPr>
+          <a:lstStyle/>
+          <a:p>
+            <a:r>
+              <a:rPr sz="1400" b="1" i="0">
+                <a:solidFill>
+                  <a:srgbClr val="1769AA"/>
+                </a:solidFill>
+                <a:latin typeface="Aptos"/>
+              </a:rPr>
+              <a:t>https://github.com/jimkliew/aiInvesting</a:t>
+            </a:r>
+            <a:r>
+              <a:rPr sz="1400" b="0" i="0">
+                <a:solidFill>
+                  <a:srgbClr val="667085"/>
+                </a:solidFill>
+                <a:latin typeface="Aptos"/>
+              </a:rPr>
+              <a:t>   open source under the MIT license</a:t>
+            </a:r>
+          </a:p>
+        </p:txBody>
+      </p:sp>
+    </p:spTree>
+  </p:cSld>
+  <p:clrMapOvr>
+    <a:masterClrMapping/>
+  </p:clrMapOvr>
+</p:sld>
+</file>
+
+<file path=ppt/slides/slide21.xml><?xml version="1.0" encoding="utf-8"?>
+<p:sld xmlns:a="http://schemas.openxmlformats.org/drawingml/2006/main" xmlns:p="http://schemas.openxmlformats.org/presentationml/2006/main" xmlns:r="http://schemas.openxmlformats.org/officeDocument/2006/relationships">
+  <p:cSld>
+    <p:spTree>
+      <p:nvGrpSpPr>
+        <p:cNvPr id="1" name=""/>
+        <p:cNvGrpSpPr/>
+        <p:nvPr/>
+      </p:nvGrpSpPr>
+      <p:grpSpPr/>
+      <p:sp>
+        <p:nvSpPr>
+          <p:cNvPr id="2" name="Rectangle 1"/>
+          <p:cNvSpPr/>
+          <p:nvPr/>
+        </p:nvSpPr>
+        <p:spPr>
+          <a:xfrm>
+            <a:off x="0" y="0"/>
+            <a:ext cx="12191695" cy="91440"/>
+          </a:xfrm>
+          <a:prstGeom prst="rect">
+            <a:avLst/>
           </a:prstGeom>
           <a:solidFill>
             <a:srgbClr val="0B1F33"/>
@@ -16802,6 +19659,120 @@
           </a:fontRef>
         </p:style>
         <p:txBody>
+          <a:bodyPr rtlCol="0" anchor="ctr"/>
+          <a:lstStyle/>
+          <a:p>
+            <a:pPr algn="ctr"/>
+          </a:p>
+        </p:txBody>
+      </p:sp>
+      <p:sp>
+        <p:nvSpPr>
+          <p:cNvPr id="3" name="TextBox 2"/>
+          <p:cNvSpPr txBox="1"/>
+          <p:nvPr/>
+        </p:nvSpPr>
+        <p:spPr>
+          <a:xfrm>
+            <a:off x="502920" y="265176"/>
+            <a:ext cx="11183112" cy="420624"/>
+          </a:xfrm>
+          <a:prstGeom prst="rect">
+            <a:avLst/>
+          </a:prstGeom>
+          <a:noFill/>
+        </p:spPr>
+        <p:txBody>
+          <a:bodyPr wrap="square" lIns="45720" rIns="45720" tIns="27432" bIns="27432" anchor="t">
+            <a:spAutoFit/>
+          </a:bodyPr>
+          <a:lstStyle/>
+          <a:p>
+            <a:r>
+              <a:rPr sz="2250" b="1" i="0">
+                <a:solidFill>
+                  <a:srgbClr val="0B1F33"/>
+                </a:solidFill>
+                <a:latin typeface="Georgia"/>
+              </a:rPr>
+              <a:t>Questions for the room</a:t>
+            </a:r>
+          </a:p>
+        </p:txBody>
+      </p:sp>
+      <p:sp>
+        <p:nvSpPr>
+          <p:cNvPr id="4" name="TextBox 3"/>
+          <p:cNvSpPr txBox="1"/>
+          <p:nvPr/>
+        </p:nvSpPr>
+        <p:spPr>
+          <a:xfrm>
+            <a:off x="502920" y="722376"/>
+            <a:ext cx="11183112" cy="192024"/>
+          </a:xfrm>
+          <a:prstGeom prst="rect">
+            <a:avLst/>
+          </a:prstGeom>
+          <a:noFill/>
+        </p:spPr>
+        <p:txBody>
+          <a:bodyPr wrap="square" lIns="45720" rIns="45720" tIns="27432" bIns="27432" anchor="t">
+            <a:spAutoFit/>
+          </a:bodyPr>
+          <a:lstStyle/>
+          <a:p>
+            <a:r>
+              <a:rPr sz="1125" b="0" i="0">
+                <a:solidFill>
+                  <a:srgbClr val="667085"/>
+                </a:solidFill>
+                <a:latin typeface="Aptos"/>
+              </a:rPr>
+              <a:t>Argue from the numbers the dashboard shows</a:t>
+            </a:r>
+          </a:p>
+        </p:txBody>
+      </p:sp>
+      <p:sp>
+        <p:nvSpPr>
+          <p:cNvPr id="5" name="Rounded Rectangle 4"/>
+          <p:cNvSpPr/>
+          <p:nvPr/>
+        </p:nvSpPr>
+        <p:spPr>
+          <a:xfrm>
+            <a:off x="502920" y="1005840"/>
+            <a:ext cx="11183112" cy="493776"/>
+          </a:xfrm>
+          <a:prstGeom prst="roundRect">
+            <a:avLst>
+              <a:gd name="adj" fmla="val 12000"/>
+            </a:avLst>
+          </a:prstGeom>
+          <a:solidFill>
+            <a:srgbClr val="0B1F33"/>
+          </a:solidFill>
+          <a:ln>
+            <a:noFill/>
+          </a:ln>
+          <a:effectLst/>
+        </p:spPr>
+        <p:style>
+          <a:lnRef idx="1">
+            <a:schemeClr val="accent1"/>
+          </a:lnRef>
+          <a:fillRef idx="3">
+            <a:schemeClr val="accent1"/>
+          </a:fillRef>
+          <a:effectRef idx="2">
+            <a:schemeClr val="accent1"/>
+          </a:effectRef>
+          <a:fontRef idx="minor">
+            <a:schemeClr val="lt1"/>
+          </a:fontRef>
+        </p:style>
+        <p:txBody>
           <a:bodyPr rtlCol="0" anchor="ctr" wrap="square" lIns="73152" rIns="73152" tIns="27432" bIns="27432"/>
           <a:lstStyle/>
           <a:p>
@@ -16813,7 +19784,7 @@
                 </a:solidFill>
                 <a:latin typeface="Georgia"/>
               </a:rPr>
-              <a:t>Four seasons of data, seven agents, one coach. What would convince you the team is skilled rather than lucky?</a:t>
+              <a:t>Six seasons of data, seven agents, one coach. What would convince you the team is skilled rather than lucky?</a:t>
             </a:r>
           </a:p>
         </p:txBody>
@@ -16848,7 +19819,7 @@
                 </a:solidFill>
                 <a:latin typeface="Aptos"/>
               </a:rPr>
-              <a:t>20</a:t>
+              <a:t>21</a:t>
             </a:r>
           </a:p>
         </p:txBody>
@@ -18785,7 +21756,7 @@
                 </a:solidFill>
                 <a:latin typeface="Aptos"/>
               </a:rPr>
-              <a:t>About 2 to 5 seconds per decision on Apple Silicon. A six-season campaign is roughly 220 model calls, about 20 minutes. Replay mode shows a recorded run in class.</a:t>
+              <a:t>About 2 to 5 seconds per model call on Apple Silicon. A six-season campaign is roughly 300 calls, 20 to 30 minutes. Replay mode shows a recorded run in class.</a:t>
             </a:r>
           </a:p>
         </p:txBody>
@@ -18954,7 +21925,7 @@
                 </a:solidFill>
                 <a:latin typeface="Aptos"/>
               </a:rPr>
-              <a:t>US large caps, daily closes, long only, weekly rebalance, 5 basis points per unit of weight traded. No shorting, leverage, options or intraday data in v1.</a:t>
+              <a:t>US large caps, daily closes, long only, monthly desk rebalance (weekly is a coach lever), 5 basis points per unit of weight traded. No shorting, leverage, options or intraday data.</a:t>
             </a:r>
           </a:p>
         </p:txBody>
@@ -21380,7 +24351,7 @@
                 </a:solidFill>
                 <a:latin typeface="Aptos"/>
               </a:rPr>
-              <a:t>The quant book trades mechanically. The desk persona makes weekly discretionary calls.</a:t>
+              <a:t>The quant book trades mechanically. The desk persona makes a discretionary call per stock at each rebalance.</a:t>
             </a:r>
           </a:p>
         </p:txBody>
@@ -22049,7 +25020,7 @@
                 </a:solidFill>
                 <a:latin typeface="Aptos"/>
               </a:rPr>
-              <a:t>Default campaign: 6 seasons from 2025 Q1 to 2026 Q2, about 220 model calls, about 20 minutes on a laptop.</a:t>
+              <a:t>Default campaign: 6 seasons from 2025 Q1 to 2026 Q2, about 300 model calls, 20 to 30 minutes on a laptop.</a:t>
             </a:r>
           </a:p>
         </p:txBody>

--- a/docs/slides/aiInvesting-slides.pptx
+++ b/docs/slides/aiInvesting-slides.pptx
@@ -24824,7 +24824,7 @@
                 </a:solidFill>
                 <a:latin typeface="Aptos"/>
               </a:rPr>
-              <a:t>Rendered from docs/architecture.html in the repo. The same diagram is in docs/ARCHITECTURE.md with the season flow, the agent table and the on-disk layout.</a:t>
+              <a:t>docs/architecture.png in the repo, drawn by docs/draw_architecture.py. docs/ARCHITECTURE.md adds the agent table, the on-disk layout and where to change things.</a:t>
             </a:r>
           </a:p>
         </p:txBody>
@@ -24837,8 +24837,8 @@
         </p:nvSpPr>
         <p:spPr>
           <a:xfrm>
-            <a:off x="3040621" y="969264"/>
-            <a:ext cx="6107709" cy="5513832"/>
+            <a:off x="2106385" y="923544"/>
+            <a:ext cx="7976180" cy="5605271"/>
           </a:xfrm>
           <a:prstGeom prst="roundRect">
             <a:avLst>
@@ -24879,7 +24879,7 @@
       </p:sp>
       <p:pic>
         <p:nvPicPr>
-          <p:cNvPr id="8" name="Picture 7" descr="architecture.png"/>
+          <p:cNvPr id="8" name="Picture 7" descr="architecture_parts.png"/>
           <p:cNvPicPr>
             <a:picLocks noChangeAspect="1"/>
           </p:cNvPicPr>
@@ -24893,8 +24893,8 @@
         </p:blipFill>
         <p:spPr>
           <a:xfrm>
-            <a:off x="3077197" y="1005840"/>
-            <a:ext cx="6034557" cy="5440680"/>
+            <a:off x="2142961" y="960120"/>
+            <a:ext cx="7903028" cy="5532119"/>
           </a:xfrm>
           <a:prstGeom prst="rect">
             <a:avLst/>
